--- a/BIZ-Jeonbok/reports/BIZ_Jeonbok_Market_Entry_Deck.pptx
+++ b/BIZ-Jeonbok/reports/BIZ_Jeonbok_Market_Entry_Deck.pptx
@@ -23,6 +23,8 @@
     <p:sldId id="271" r:id="rId22"/>
     <p:sldId id="272" r:id="rId23"/>
     <p:sldId id="273" r:id="rId24"/>
+    <p:sldId id="274" r:id="rId25"/>
+    <p:sldId id="275" r:id="rId26"/>
   </p:sldIdLst>
   <p:sldSz cx="12191695" cy="6858000" type="screen4x3"/>
   <p:notesSz cx="6858000" cy="9144000"/>
@@ -3170,7 +3172,7 @@
           </a:bodyPr>
           <a:lstStyle/>
           <a:p>
-            <a:pPr algn="l">
+            <a:pPr>
               <a:defRPr b="1" sz="3600">
                 <a:solidFill>
                   <a:srgbClr val="FFFFFF"/>
@@ -3182,7 +3184,7 @@
             </a:r>
           </a:p>
           <a:p>
-            <a:pPr algn="l">
+            <a:pPr>
               <a:defRPr sz="2000">
                 <a:solidFill>
                   <a:srgbClr val="D0E0F0"/>
@@ -3190,7 +3192,7 @@
               </a:defRPr>
             </a:pPr>
             <a:r>
-              <a:t>UN Comtrade 무역 분석, 15개 차트, 미수 가격 구조 및 로컬 파트너 소싱 전략</a:t>
+              <a:t>UN Comtrade 무역 분석, 15개 차트, TOP 10 유망국가 10개국 완비 및 파트너 소싱 전략</a:t>
             </a:r>
           </a:p>
         </p:txBody>
@@ -3243,14 +3245,14 @@
               </a:defRPr>
             </a:pPr>
             <a:r>
-              <a:t>📊 8. TOP 5 수입국 연도별 성장 추이</a:t>
+              <a:t>📊 5. 월별 거래 계절성 지수</a:t>
             </a:r>
           </a:p>
         </p:txBody>
       </p:sp>
       <p:pic>
         <p:nvPicPr>
-          <p:cNvPr id="3" name="Picture 2" descr="08_top5_importer_growth.png"/>
+          <p:cNvPr id="3" name="Picture 2" descr="05_monthly_seasonality.png"/>
           <p:cNvPicPr>
             <a:picLocks noChangeAspect="1"/>
           </p:cNvPicPr>
@@ -3320,14 +3322,91 @@
               </a:defRPr>
             </a:pPr>
             <a:r>
-              <a:t>📊 9. 수입 시장 파레토 집중도 분석</a:t>
+              <a:t>📊 6. HS Code별 거래액 점유율</a:t>
             </a:r>
           </a:p>
         </p:txBody>
       </p:sp>
       <p:pic>
         <p:nvPicPr>
-          <p:cNvPr id="3" name="Picture 2" descr="09_market_concentration_pareto.png"/>
+          <p:cNvPr id="3" name="Picture 2" descr="06_hs_code_share.png"/>
+          <p:cNvPicPr>
+            <a:picLocks noChangeAspect="1"/>
+          </p:cNvPicPr>
+          <p:nvPr/>
+        </p:nvPicPr>
+        <p:blipFill>
+          <a:blip r:embed="rId2"/>
+          <a:stretch>
+            <a:fillRect/>
+          </a:stretch>
+        </p:blipFill>
+        <p:spPr>
+          <a:xfrm>
+            <a:off x="1371600" y="1280160"/>
+            <a:ext cx="9448495" cy="9448495"/>
+          </a:xfrm>
+          <a:prstGeom prst="rect">
+            <a:avLst/>
+          </a:prstGeom>
+        </p:spPr>
+      </p:pic>
+    </p:spTree>
+  </p:cSld>
+  <p:clrMapOvr>
+    <a:masterClrMapping/>
+  </p:clrMapOvr>
+</p:sld>
+</file>
+
+<file path=ppt/slides/slide12.xml><?xml version="1.0" encoding="utf-8"?>
+<p:sld xmlns:a="http://schemas.openxmlformats.org/drawingml/2006/main" xmlns:p="http://schemas.openxmlformats.org/presentationml/2006/main" xmlns:r="http://schemas.openxmlformats.org/officeDocument/2006/relationships">
+  <p:cSld>
+    <p:spTree>
+      <p:nvGrpSpPr>
+        <p:cNvPr id="1" name=""/>
+        <p:cNvGrpSpPr/>
+        <p:nvPr/>
+      </p:nvGrpSpPr>
+      <p:grpSpPr/>
+      <p:sp>
+        <p:nvSpPr>
+          <p:cNvPr id="2" name="TextBox 1"/>
+          <p:cNvSpPr txBox="1"/>
+          <p:nvPr/>
+        </p:nvSpPr>
+        <p:spPr>
+          <a:xfrm>
+            <a:off x="731520" y="365760"/>
+            <a:ext cx="10698480" cy="731520"/>
+          </a:xfrm>
+          <a:prstGeom prst="rect">
+            <a:avLst/>
+          </a:prstGeom>
+          <a:noFill/>
+        </p:spPr>
+        <p:txBody>
+          <a:bodyPr wrap="none">
+            <a:spAutoFit/>
+          </a:bodyPr>
+          <a:lstStyle/>
+          <a:p>
+            <a:pPr>
+              <a:defRPr b="1" sz="2400">
+                <a:solidFill>
+                  <a:srgbClr val="1F497D"/>
+                </a:solidFill>
+              </a:defRPr>
+            </a:pPr>
+            <a:r>
+              <a:t>📊 7. 물량 vs 단가 상관관계 산점도</a:t>
+            </a:r>
+          </a:p>
+        </p:txBody>
+      </p:sp>
+      <p:pic>
+        <p:nvPicPr>
+          <p:cNvPr id="3" name="Picture 2" descr="07_price_vs_weight_scatter.png"/>
           <p:cNvPicPr>
             <a:picLocks noChangeAspect="1"/>
           </p:cNvPicPr>
@@ -3357,7 +3436,7 @@
 </p:sld>
 </file>
 
-<file path=ppt/slides/slide12.xml><?xml version="1.0" encoding="utf-8"?>
+<file path=ppt/slides/slide13.xml><?xml version="1.0" encoding="utf-8"?>
 <p:sld xmlns:a="http://schemas.openxmlformats.org/drawingml/2006/main" xmlns:p="http://schemas.openxmlformats.org/presentationml/2006/main" xmlns:r="http://schemas.openxmlformats.org/officeDocument/2006/relationships">
   <p:cSld>
     <p:spTree>
@@ -3397,91 +3476,14 @@
               </a:defRPr>
             </a:pPr>
             <a:r>
-              <a:t>📊 10. 주요 수입국별 연도별 평균 단가 히트맵</a:t>
+              <a:t>📊 8. TOP 5 수입국 연도별 성장 추이</a:t>
             </a:r>
           </a:p>
         </p:txBody>
       </p:sp>
       <p:pic>
         <p:nvPicPr>
-          <p:cNvPr id="3" name="Picture 2" descr="10_export_price_heatmap.png"/>
-          <p:cNvPicPr>
-            <a:picLocks noChangeAspect="1"/>
-          </p:cNvPicPr>
-          <p:nvPr/>
-        </p:nvPicPr>
-        <p:blipFill>
-          <a:blip r:embed="rId2"/>
-          <a:stretch>
-            <a:fillRect/>
-          </a:stretch>
-        </p:blipFill>
-        <p:spPr>
-          <a:xfrm>
-            <a:off x="1371600" y="1280160"/>
-            <a:ext cx="9448495" cy="5669097"/>
-          </a:xfrm>
-          <a:prstGeom prst="rect">
-            <a:avLst/>
-          </a:prstGeom>
-        </p:spPr>
-      </p:pic>
-    </p:spTree>
-  </p:cSld>
-  <p:clrMapOvr>
-    <a:masterClrMapping/>
-  </p:clrMapOvr>
-</p:sld>
-</file>
-
-<file path=ppt/slides/slide13.xml><?xml version="1.0" encoding="utf-8"?>
-<p:sld xmlns:a="http://schemas.openxmlformats.org/drawingml/2006/main" xmlns:p="http://schemas.openxmlformats.org/presentationml/2006/main" xmlns:r="http://schemas.openxmlformats.org/officeDocument/2006/relationships">
-  <p:cSld>
-    <p:spTree>
-      <p:nvGrpSpPr>
-        <p:cNvPr id="1" name=""/>
-        <p:cNvGrpSpPr/>
-        <p:nvPr/>
-      </p:nvGrpSpPr>
-      <p:grpSpPr/>
-      <p:sp>
-        <p:nvSpPr>
-          <p:cNvPr id="2" name="TextBox 1"/>
-          <p:cNvSpPr txBox="1"/>
-          <p:nvPr/>
-        </p:nvSpPr>
-        <p:spPr>
-          <a:xfrm>
-            <a:off x="731520" y="365760"/>
-            <a:ext cx="10698480" cy="731520"/>
-          </a:xfrm>
-          <a:prstGeom prst="rect">
-            <a:avLst/>
-          </a:prstGeom>
-          <a:noFill/>
-        </p:spPr>
-        <p:txBody>
-          <a:bodyPr wrap="none">
-            <a:spAutoFit/>
-          </a:bodyPr>
-          <a:lstStyle/>
-          <a:p>
-            <a:pPr>
-              <a:defRPr b="1" sz="2400">
-                <a:solidFill>
-                  <a:srgbClr val="1F497D"/>
-                </a:solidFill>
-              </a:defRPr>
-            </a:pPr>
-            <a:r>
-              <a:t>📊 11. 무역 구조 폭포수 분석</a:t>
-            </a:r>
-          </a:p>
-        </p:txBody>
-      </p:sp>
-      <p:pic>
-        <p:nvPicPr>
-          <p:cNvPr id="3" name="Picture 2" descr="11_trade_balance_waterfall.png"/>
+          <p:cNvPr id="3" name="Picture 2" descr="08_top5_importer_growth.png"/>
           <p:cNvPicPr>
             <a:picLocks noChangeAspect="1"/>
           </p:cNvPicPr>
@@ -3551,14 +3553,14 @@
               </a:defRPr>
             </a:pPr>
             <a:r>
-              <a:t>📊 12. TOP 주요 국가별 단가 변동성 박스플롯</a:t>
+              <a:t>📊 9. 수입 시장 파레토 집중도 분석</a:t>
             </a:r>
           </a:p>
         </p:txBody>
       </p:sp>
       <p:pic>
         <p:nvPicPr>
-          <p:cNvPr id="3" name="Picture 2" descr="12_country_price_boxplot.png"/>
+          <p:cNvPr id="3" name="Picture 2" descr="09_market_concentration_pareto.png"/>
           <p:cNvPicPr>
             <a:picLocks noChangeAspect="1"/>
           </p:cNvPicPr>
@@ -3628,14 +3630,14 @@
               </a:defRPr>
             </a:pPr>
             <a:r>
-              <a:t>📊 13. 시장 집중도(HHI Index) 추이</a:t>
+              <a:t>📊 10. 주요 수입국별 연도별 평균 단가 히트맵</a:t>
             </a:r>
           </a:p>
         </p:txBody>
       </p:sp>
       <p:pic>
         <p:nvPicPr>
-          <p:cNvPr id="3" name="Picture 2" descr="13_hhi_index_trend.png"/>
+          <p:cNvPr id="3" name="Picture 2" descr="10_export_price_heatmap.png"/>
           <p:cNvPicPr>
             <a:picLocks noChangeAspect="1"/>
           </p:cNvPicPr>
@@ -3650,7 +3652,7 @@
         <p:spPr>
           <a:xfrm>
             <a:off x="1371600" y="1280160"/>
-            <a:ext cx="9448495" cy="4724248"/>
+            <a:ext cx="9448495" cy="5669097"/>
           </a:xfrm>
           <a:prstGeom prst="rect">
             <a:avLst/>
@@ -3705,14 +3707,14 @@
               </a:defRPr>
             </a:pPr>
             <a:r>
-              <a:t>📊 14. 미수(Size) 규격별 가격 구조</a:t>
+              <a:t>📊 11. 무역 구조 폭포수 분석</a:t>
             </a:r>
           </a:p>
         </p:txBody>
       </p:sp>
       <p:pic>
         <p:nvPicPr>
-          <p:cNvPr id="3" name="Picture 2" descr="14_size_pricing_structure.png"/>
+          <p:cNvPr id="3" name="Picture 2" descr="11_trade_balance_waterfall.png"/>
           <p:cNvPicPr>
             <a:picLocks noChangeAspect="1"/>
           </p:cNvPicPr>
@@ -3782,14 +3784,14 @@
               </a:defRPr>
             </a:pPr>
             <a:r>
-              <a:t>📊 15. 전복 유망 국가 시장 성숙도-단가 매트릭스</a:t>
+              <a:t>📊 12. TOP 주요 국가별 단가 변동성 박스플롯</a:t>
             </a:r>
           </a:p>
         </p:txBody>
       </p:sp>
       <p:pic>
         <p:nvPicPr>
-          <p:cNvPr id="3" name="Picture 2" descr="15_promising_country_matrix.png"/>
+          <p:cNvPr id="3" name="Picture 2" descr="12_country_price_boxplot.png"/>
           <p:cNvPicPr>
             <a:picLocks noChangeAspect="1"/>
           </p:cNvPicPr>
@@ -3837,7 +3839,7 @@
         </p:nvSpPr>
         <p:spPr>
           <a:xfrm>
-            <a:off x="731520" y="457200"/>
+            <a:off x="731520" y="365760"/>
             <a:ext cx="10698480" cy="731520"/>
           </a:xfrm>
           <a:prstGeom prst="rect">
@@ -3859,954 +3861,14 @@
               </a:defRPr>
             </a:pPr>
             <a:r>
-              <a:t>🎁 4대 특별 부록 (1인 상사 실전 무역 영업 패키지)</a:t>
-            </a:r>
-          </a:p>
-        </p:txBody>
-      </p:sp>
-      <p:sp>
-        <p:nvSpPr>
-          <p:cNvPr id="3" name="TextBox 2"/>
-          <p:cNvSpPr txBox="1"/>
-          <p:nvPr/>
-        </p:nvSpPr>
-        <p:spPr>
-          <a:xfrm>
-            <a:off x="731520" y="1371600"/>
-            <a:ext cx="10698480" cy="4754880"/>
-          </a:xfrm>
-          <a:prstGeom prst="rect">
-            <a:avLst/>
-          </a:prstGeom>
-          <a:noFill/>
-        </p:spPr>
-        <p:txBody>
-          <a:bodyPr wrap="square">
-            <a:spAutoFit/>
-          </a:bodyPr>
-          <a:lstStyle/>
-          <a:p/>
-          <a:p>
-            <a:pPr>
-              <a:spcAft>
-                <a:spcPts val="1800"/>
-              </a:spcAft>
-              <a:defRPr sz="1600">
-                <a:solidFill>
-                  <a:srgbClr val="333333"/>
-                </a:solidFill>
-              </a:defRPr>
-            </a:pPr>
-            <a:r>
-              <a:t>1. 1인 상사 실전 B2B 오퍼서: FOB/CIF 단가, MOQ, IQF/포장 규격 스펙, HACCP/FDA 검역 승인 패키지 제공</a:t>
-            </a:r>
-          </a:p>
-          <a:p>
-            <a:pPr>
-              <a:spcAft>
-                <a:spcPts val="1800"/>
-              </a:spcAft>
-              <a:defRPr sz="1600">
-                <a:solidFill>
-                  <a:srgbClr val="333333"/>
-                </a:solidFill>
-              </a:defRPr>
-            </a:pPr>
-            <a:r>
-              <a:t>2. 해외 바이어 콜드 어프로치: 1차 Cold Pitch 이메일 ➔ 2차 LinkedIn InMail ➔ 3차 모바일/전화 협의 3단계 파이프라인</a:t>
-            </a:r>
-          </a:p>
-          <a:p>
-            <a:pPr>
-              <a:spcAft>
-                <a:spcPts val="1800"/>
-              </a:spcAft>
-              <a:defRPr sz="1600">
-                <a:solidFill>
-                  <a:srgbClr val="333333"/>
-                </a:solidFill>
-              </a:defRPr>
-            </a:pPr>
-            <a:r>
-              <a:t>3. 글로벌 수산/식품 주요 박람회: 도쿄 수산전시회(8월), 보스턴 SENA 박람회(3월), 홍콩/상하이 수산전시회 소싱 가이드</a:t>
-            </a:r>
-          </a:p>
-          <a:p>
-            <a:pPr>
-              <a:spcAft>
-                <a:spcPts val="1800"/>
-              </a:spcAft>
-              <a:defRPr sz="1600">
-                <a:solidFill>
-                  <a:srgbClr val="333333"/>
-                </a:solidFill>
-              </a:defRPr>
-            </a:pPr>
-            <a:r>
-              <a:t>4. 무역보험공사 수출안전망: L/C, T/T 결제 조건 안전책, K-SURE 단기수출보험 가입 및 화물 적하보험 온도 로깅 장치 부착</a:t>
-            </a:r>
-          </a:p>
-        </p:txBody>
-      </p:sp>
-    </p:spTree>
-  </p:cSld>
-  <p:clrMapOvr>
-    <a:masterClrMapping/>
-  </p:clrMapOvr>
-</p:sld>
-</file>
-
-<file path=ppt/slides/slide2.xml><?xml version="1.0" encoding="utf-8"?>
-<p:sld xmlns:a="http://schemas.openxmlformats.org/drawingml/2006/main" xmlns:p="http://schemas.openxmlformats.org/presentationml/2006/main" xmlns:r="http://schemas.openxmlformats.org/officeDocument/2006/relationships">
-  <p:cSld>
-    <p:spTree>
-      <p:nvGrpSpPr>
-        <p:cNvPr id="1" name=""/>
-        <p:cNvGrpSpPr/>
-        <p:nvPr/>
-      </p:nvGrpSpPr>
-      <p:grpSpPr/>
-      <p:sp>
-        <p:nvSpPr>
-          <p:cNvPr id="2" name="TextBox 1"/>
-          <p:cNvSpPr txBox="1"/>
-          <p:nvPr/>
-        </p:nvSpPr>
-        <p:spPr>
-          <a:xfrm>
-            <a:off x="731520" y="457200"/>
-            <a:ext cx="10698480" cy="914400"/>
-          </a:xfrm>
-          <a:prstGeom prst="rect">
-            <a:avLst/>
-          </a:prstGeom>
-          <a:noFill/>
-        </p:spPr>
-        <p:txBody>
-          <a:bodyPr wrap="none">
-            <a:spAutoFit/>
-          </a:bodyPr>
-          <a:lstStyle/>
-          <a:p>
-            <a:pPr>
-              <a:defRPr b="1" sz="2400">
-                <a:solidFill>
-                  <a:srgbClr val="1F497D"/>
-                </a:solidFill>
-              </a:defRPr>
-            </a:pPr>
-            <a:r>
-              <a:t>📌 Executive Summary: 미수(Size)별 가격 구조</a:t>
-            </a:r>
-          </a:p>
-        </p:txBody>
-      </p:sp>
-      <p:graphicFrame>
-        <p:nvGraphicFramePr>
-          <p:cNvPr id="3" name="Table 2"/>
-          <p:cNvGraphicFramePr>
-            <a:graphicFrameLocks noGrp="1"/>
-          </p:cNvGraphicFramePr>
-          <p:nvPr/>
-        </p:nvGraphicFramePr>
-        <p:xfrm>
-          <a:off x="731520" y="1645920"/>
-          <a:ext cx="10698480" cy="4389120"/>
-        </p:xfrm>
-        <a:graphic>
-          <a:graphicData uri="http://schemas.openxmlformats.org/drawingml/2006/table">
-            <a:tbl>
-              <a:tblPr firstRow="1" bandRow="1">
-                <a:tableStyleId>{5C22544A-7EE6-4342-B048-85BDC9FD1C3A}</a:tableStyleId>
-              </a:tblPr>
-              <a:tblGrid>
-                <a:gridCol w="1783080"/>
-                <a:gridCol w="1783080"/>
-                <a:gridCol w="1783080"/>
-                <a:gridCol w="1783080"/>
-                <a:gridCol w="1783080"/>
-                <a:gridCol w="1783080"/>
-              </a:tblGrid>
-              <a:tr h="731520">
-                <a:tc>
-                  <a:txBody>
-                    <a:bodyPr/>
-                    <a:lstStyle/>
-                    <a:p>
-                      <a:pPr>
-                        <a:defRPr sz="1200" b="1">
-                          <a:solidFill>
-                            <a:srgbClr val="FFFFFF"/>
-                          </a:solidFill>
-                        </a:defRPr>
-                      </a:pPr>
-                      <a:r>
-                        <a:t>품목 규격 / 미수</a:t>
-                      </a:r>
-                    </a:p>
-                  </a:txBody>
-                  <a:tcPr>
-                    <a:solidFill>
-                      <a:srgbClr val="1F497D"/>
-                    </a:solidFill>
-                  </a:tcPr>
-                </a:tc>
-                <a:tc>
-                  <a:txBody>
-                    <a:bodyPr/>
-                    <a:lstStyle/>
-                    <a:p>
-                      <a:pPr>
-                        <a:defRPr sz="1200" b="1">
-                          <a:solidFill>
-                            <a:srgbClr val="FFFFFF"/>
-                          </a:solidFill>
-                        </a:defRPr>
-                      </a:pPr>
-                      <a:r>
-                        <a:t>마리당 중량</a:t>
-                      </a:r>
-                    </a:p>
-                  </a:txBody>
-                  <a:tcPr>
-                    <a:solidFill>
-                      <a:srgbClr val="1F497D"/>
-                    </a:solidFill>
-                  </a:tcPr>
-                </a:tc>
-                <a:tc>
-                  <a:txBody>
-                    <a:bodyPr/>
-                    <a:lstStyle/>
-                    <a:p>
-                      <a:pPr>
-                        <a:defRPr sz="1200" b="1">
-                          <a:solidFill>
-                            <a:srgbClr val="FFFFFF"/>
-                          </a:solidFill>
-                        </a:defRPr>
-                      </a:pPr>
-                      <a:r>
-                        <a:t>주요 수출국</a:t>
-                      </a:r>
-                    </a:p>
-                  </a:txBody>
-                  <a:tcPr>
-                    <a:solidFill>
-                      <a:srgbClr val="1F497D"/>
-                    </a:solidFill>
-                  </a:tcPr>
-                </a:tc>
-                <a:tc>
-                  <a:txBody>
-                    <a:bodyPr/>
-                    <a:lstStyle/>
-                    <a:p>
-                      <a:pPr>
-                        <a:defRPr sz="1200" b="1">
-                          <a:solidFill>
-                            <a:srgbClr val="FFFFFF"/>
-                          </a:solidFill>
-                        </a:defRPr>
-                      </a:pPr>
-                      <a:r>
-                        <a:t>평균 단가</a:t>
-                      </a:r>
-                    </a:p>
-                  </a:txBody>
-                  <a:tcPr>
-                    <a:solidFill>
-                      <a:srgbClr val="1F497D"/>
-                    </a:solidFill>
-                  </a:tcPr>
-                </a:tc>
-                <a:tc>
-                  <a:txBody>
-                    <a:bodyPr/>
-                    <a:lstStyle/>
-                    <a:p>
-                      <a:pPr>
-                        <a:defRPr sz="1200" b="1">
-                          <a:solidFill>
-                            <a:srgbClr val="FFFFFF"/>
-                          </a:solidFill>
-                        </a:defRPr>
-                      </a:pPr>
-                      <a:r>
-                        <a:t>주요 타깃 시장</a:t>
-                      </a:r>
-                    </a:p>
-                  </a:txBody>
-                  <a:tcPr>
-                    <a:solidFill>
-                      <a:srgbClr val="1F497D"/>
-                    </a:solidFill>
-                  </a:tcPr>
-                </a:tc>
-                <a:tc>
-                  <a:txBody>
-                    <a:bodyPr/>
-                    <a:lstStyle/>
-                    <a:p>
-                      <a:pPr>
-                        <a:defRPr sz="1200" b="1">
-                          <a:solidFill>
-                            <a:srgbClr val="FFFFFF"/>
-                          </a:solidFill>
-                        </a:defRPr>
-                      </a:pPr>
-                      <a:r>
-                        <a:t>소싱 추천 포인트</a:t>
-                      </a:r>
-                    </a:p>
-                  </a:txBody>
-                  <a:tcPr>
-                    <a:solidFill>
-                      <a:srgbClr val="1F497D"/>
-                    </a:solidFill>
-                  </a:tcPr>
-                </a:tc>
-              </a:tr>
-              <a:tr h="731520">
-                <a:tc>
-                  <a:txBody>
-                    <a:bodyPr/>
-                    <a:lstStyle/>
-                    <a:p>
-                      <a:pPr>
-                        <a:defRPr sz="1200">
-                          <a:solidFill>
-                            <a:srgbClr val="333333"/>
-                          </a:solidFill>
-                        </a:defRPr>
-                      </a:pPr>
-                      <a:r>
-                        <a:t>10미 미만 (대과)</a:t>
-                      </a:r>
-                    </a:p>
-                  </a:txBody>
-                  <a:tcPr/>
-                </a:tc>
-                <a:tc>
-                  <a:txBody>
-                    <a:bodyPr/>
-                    <a:lstStyle/>
-                    <a:p>
-                      <a:pPr>
-                        <a:defRPr sz="1200">
-                          <a:solidFill>
-                            <a:srgbClr val="333333"/>
-                          </a:solidFill>
-                        </a:defRPr>
-                      </a:pPr>
-                      <a:r>
-                        <a:t>100g 이상</a:t>
-                      </a:r>
-                    </a:p>
-                  </a:txBody>
-                  <a:tcPr/>
-                </a:tc>
-                <a:tc>
-                  <a:txBody>
-                    <a:bodyPr/>
-                    <a:lstStyle/>
-                    <a:p>
-                      <a:pPr>
-                        <a:defRPr sz="1200">
-                          <a:solidFill>
-                            <a:srgbClr val="333333"/>
-                          </a:solidFill>
-                        </a:defRPr>
-                      </a:pPr>
-                      <a:r>
-                        <a:t>한국 완도, 호주</a:t>
-                      </a:r>
-                    </a:p>
-                  </a:txBody>
-                  <a:tcPr/>
-                </a:tc>
-                <a:tc>
-                  <a:txBody>
-                    <a:bodyPr/>
-                    <a:lstStyle/>
-                    <a:p>
-                      <a:pPr>
-                        <a:defRPr sz="1200">
-                          <a:solidFill>
-                            <a:srgbClr val="333333"/>
-                          </a:solidFill>
-                        </a:defRPr>
-                      </a:pPr>
-                      <a:r>
-                        <a:t>$42.0 ~ $48.0</a:t>
-                      </a:r>
-                    </a:p>
-                  </a:txBody>
-                  <a:tcPr/>
-                </a:tc>
-                <a:tc>
-                  <a:txBody>
-                    <a:bodyPr/>
-                    <a:lstStyle/>
-                    <a:p>
-                      <a:pPr>
-                        <a:defRPr sz="1200">
-                          <a:solidFill>
-                            <a:srgbClr val="333333"/>
-                          </a:solidFill>
-                        </a:defRPr>
-                      </a:pPr>
-                      <a:r>
-                        <a:t>일본 고급 일식집, 료칸</a:t>
-                      </a:r>
-                    </a:p>
-                  </a:txBody>
-                  <a:tcPr/>
-                </a:tc>
-                <a:tc>
-                  <a:txBody>
-                    <a:bodyPr/>
-                    <a:lstStyle/>
-                    <a:p>
-                      <a:pPr>
-                        <a:defRPr sz="1200">
-                          <a:solidFill>
-                            <a:srgbClr val="333333"/>
-                          </a:solidFill>
-                        </a:defRPr>
-                      </a:pPr>
-                      <a:r>
-                        <a:t>고급 항공직송 프리미엄 오퍼</a:t>
-                      </a:r>
-                    </a:p>
-                  </a:txBody>
-                  <a:tcPr/>
-                </a:tc>
-              </a:tr>
-              <a:tr h="731520">
-                <a:tc>
-                  <a:txBody>
-                    <a:bodyPr/>
-                    <a:lstStyle/>
-                    <a:p>
-                      <a:pPr>
-                        <a:defRPr sz="1200">
-                          <a:solidFill>
-                            <a:srgbClr val="333333"/>
-                          </a:solidFill>
-                        </a:defRPr>
-                      </a:pPr>
-                      <a:r>
-                        <a:t>10 ~ 12미 (중대과)</a:t>
-                      </a:r>
-                    </a:p>
-                  </a:txBody>
-                  <a:tcPr/>
-                </a:tc>
-                <a:tc>
-                  <a:txBody>
-                    <a:bodyPr/>
-                    <a:lstStyle/>
-                    <a:p>
-                      <a:pPr>
-                        <a:defRPr sz="1200">
-                          <a:solidFill>
-                            <a:srgbClr val="333333"/>
-                          </a:solidFill>
-                        </a:defRPr>
-                      </a:pPr>
-                      <a:r>
-                        <a:t>80g ~ 100g</a:t>
-                      </a:r>
-                    </a:p>
-                  </a:txBody>
-                  <a:tcPr/>
-                </a:tc>
-                <a:tc>
-                  <a:txBody>
-                    <a:bodyPr/>
-                    <a:lstStyle/>
-                    <a:p>
-                      <a:pPr>
-                        <a:defRPr sz="1200">
-                          <a:solidFill>
-                            <a:srgbClr val="333333"/>
-                          </a:solidFill>
-                        </a:defRPr>
-                      </a:pPr>
-                      <a:r>
-                        <a:t>한국 완도</a:t>
-                      </a:r>
-                    </a:p>
-                  </a:txBody>
-                  <a:tcPr/>
-                </a:tc>
-                <a:tc>
-                  <a:txBody>
-                    <a:bodyPr/>
-                    <a:lstStyle/>
-                    <a:p>
-                      <a:pPr>
-                        <a:defRPr sz="1200">
-                          <a:solidFill>
-                            <a:srgbClr val="333333"/>
-                          </a:solidFill>
-                        </a:defRPr>
-                      </a:pPr>
-                      <a:r>
-                        <a:t>$36.0 ~ $40.0</a:t>
-                      </a:r>
-                    </a:p>
-                  </a:txBody>
-                  <a:tcPr/>
-                </a:tc>
-                <a:tc>
-                  <a:txBody>
-                    <a:bodyPr/>
-                    <a:lstStyle/>
-                    <a:p>
-                      <a:pPr>
-                        <a:defRPr sz="1200">
-                          <a:solidFill>
-                            <a:srgbClr val="333333"/>
-                          </a:solidFill>
-                        </a:defRPr>
-                      </a:pPr>
-                      <a:r>
-                        <a:t>도쿄 도요스 시장 도매상사</a:t>
-                      </a:r>
-                    </a:p>
-                  </a:txBody>
-                  <a:tcPr/>
-                </a:tc>
-                <a:tc>
-                  <a:txBody>
-                    <a:bodyPr/>
-                    <a:lstStyle/>
-                    <a:p>
-                      <a:pPr>
-                        <a:defRPr sz="1200">
-                          <a:solidFill>
-                            <a:srgbClr val="333333"/>
-                          </a:solidFill>
-                        </a:defRPr>
-                      </a:pPr>
-                      <a:r>
-                        <a:t>메인 수출 주력 미수 1차 상사</a:t>
-                      </a:r>
-                    </a:p>
-                  </a:txBody>
-                  <a:tcPr/>
-                </a:tc>
-              </a:tr>
-              <a:tr h="731520">
-                <a:tc>
-                  <a:txBody>
-                    <a:bodyPr/>
-                    <a:lstStyle/>
-                    <a:p>
-                      <a:pPr>
-                        <a:defRPr sz="1200">
-                          <a:solidFill>
-                            <a:srgbClr val="333333"/>
-                          </a:solidFill>
-                        </a:defRPr>
-                      </a:pPr>
-                      <a:r>
-                        <a:t>13 ~ 15미 (중과)</a:t>
-                      </a:r>
-                    </a:p>
-                  </a:txBody>
-                  <a:tcPr/>
-                </a:tc>
-                <a:tc>
-                  <a:txBody>
-                    <a:bodyPr/>
-                    <a:lstStyle/>
-                    <a:p>
-                      <a:pPr>
-                        <a:defRPr sz="1200">
-                          <a:solidFill>
-                            <a:srgbClr val="333333"/>
-                          </a:solidFill>
-                        </a:defRPr>
-                      </a:pPr>
-                      <a:r>
-                        <a:t>65g ~ 80g</a:t>
-                      </a:r>
-                    </a:p>
-                  </a:txBody>
-                  <a:tcPr/>
-                </a:tc>
-                <a:tc>
-                  <a:txBody>
-                    <a:bodyPr/>
-                    <a:lstStyle/>
-                    <a:p>
-                      <a:pPr>
-                        <a:defRPr sz="1200">
-                          <a:solidFill>
-                            <a:srgbClr val="333333"/>
-                          </a:solidFill>
-                        </a:defRPr>
-                      </a:pPr>
-                      <a:r>
-                        <a:t>한국, 중국</a:t>
-                      </a:r>
-                    </a:p>
-                  </a:txBody>
-                  <a:tcPr/>
-                </a:tc>
-                <a:tc>
-                  <a:txBody>
-                    <a:bodyPr/>
-                    <a:lstStyle/>
-                    <a:p>
-                      <a:pPr>
-                        <a:defRPr sz="1200">
-                          <a:solidFill>
-                            <a:srgbClr val="333333"/>
-                          </a:solidFill>
-                        </a:defRPr>
-                      </a:pPr>
-                      <a:r>
-                        <a:t>$30.0 ~ $34.0</a:t>
-                      </a:r>
-                    </a:p>
-                  </a:txBody>
-                  <a:tcPr/>
-                </a:tc>
-                <a:tc>
-                  <a:txBody>
-                    <a:bodyPr/>
-                    <a:lstStyle/>
-                    <a:p>
-                      <a:pPr>
-                        <a:defRPr sz="1200">
-                          <a:solidFill>
-                            <a:srgbClr val="333333"/>
-                          </a:solidFill>
-                        </a:defRPr>
-                      </a:pPr>
-                      <a:r>
-                        <a:t>관서 레스토랑, 아시안 마트</a:t>
-                      </a:r>
-                    </a:p>
-                  </a:txBody>
-                  <a:tcPr/>
-                </a:tc>
-                <a:tc>
-                  <a:txBody>
-                    <a:bodyPr/>
-                    <a:lstStyle/>
-                    <a:p>
-                      <a:pPr>
-                        <a:defRPr sz="1200">
-                          <a:solidFill>
-                            <a:srgbClr val="333333"/>
-                          </a:solidFill>
-                        </a:defRPr>
-                      </a:pPr>
-                      <a:r>
-                        <a:t>H-Mart, 99 Ranch 채널 공급</a:t>
-                      </a:r>
-                    </a:p>
-                  </a:txBody>
-                  <a:tcPr/>
-                </a:tc>
-              </a:tr>
-              <a:tr h="731520">
-                <a:tc>
-                  <a:txBody>
-                    <a:bodyPr/>
-                    <a:lstStyle/>
-                    <a:p>
-                      <a:pPr>
-                        <a:defRPr sz="1200">
-                          <a:solidFill>
-                            <a:srgbClr val="333333"/>
-                          </a:solidFill>
-                        </a:defRPr>
-                      </a:pPr>
-                      <a:r>
-                        <a:t>15 ~ 20미 (중소과)</a:t>
-                      </a:r>
-                    </a:p>
-                  </a:txBody>
-                  <a:tcPr/>
-                </a:tc>
-                <a:tc>
-                  <a:txBody>
-                    <a:bodyPr/>
-                    <a:lstStyle/>
-                    <a:p>
-                      <a:pPr>
-                        <a:defRPr sz="1200">
-                          <a:solidFill>
-                            <a:srgbClr val="333333"/>
-                          </a:solidFill>
-                        </a:defRPr>
-                      </a:pPr>
-                      <a:r>
-                        <a:t>50g ~ 65g</a:t>
-                      </a:r>
-                    </a:p>
-                  </a:txBody>
-                  <a:tcPr/>
-                </a:tc>
-                <a:tc>
-                  <a:txBody>
-                    <a:bodyPr/>
-                    <a:lstStyle/>
-                    <a:p>
-                      <a:pPr>
-                        <a:defRPr sz="1200">
-                          <a:solidFill>
-                            <a:srgbClr val="333333"/>
-                          </a:solidFill>
-                        </a:defRPr>
-                      </a:pPr>
-                      <a:r>
-                        <a:t>한국, 베트남</a:t>
-                      </a:r>
-                    </a:p>
-                  </a:txBody>
-                  <a:tcPr/>
-                </a:tc>
-                <a:tc>
-                  <a:txBody>
-                    <a:bodyPr/>
-                    <a:lstStyle/>
-                    <a:p>
-                      <a:pPr>
-                        <a:defRPr sz="1200">
-                          <a:solidFill>
-                            <a:srgbClr val="333333"/>
-                          </a:solidFill>
-                        </a:defRPr>
-                      </a:pPr>
-                      <a:r>
-                        <a:t>$24.0 ~ $28.0</a:t>
-                      </a:r>
-                    </a:p>
-                  </a:txBody>
-                  <a:tcPr/>
-                </a:tc>
-                <a:tc>
-                  <a:txBody>
-                    <a:bodyPr/>
-                    <a:lstStyle/>
-                    <a:p>
-                      <a:pPr>
-                        <a:defRPr sz="1200">
-                          <a:solidFill>
-                            <a:srgbClr val="333333"/>
-                          </a:solidFill>
-                        </a:defRPr>
-                      </a:pPr>
-                      <a:r>
-                        <a:t>냉동 IQF 가공, 외식 체인</a:t>
-                      </a:r>
-                    </a:p>
-                  </a:txBody>
-                  <a:tcPr/>
-                </a:tc>
-                <a:tc>
-                  <a:txBody>
-                    <a:bodyPr/>
-                    <a:lstStyle/>
-                    <a:p>
-                      <a:pPr>
-                        <a:defRPr sz="1200">
-                          <a:solidFill>
-                            <a:srgbClr val="333333"/>
-                          </a:solidFill>
-                        </a:defRPr>
-                      </a:pPr>
-                      <a:r>
-                        <a:t>해상 IQF 컨테이너 대량 공급</a:t>
-                      </a:r>
-                    </a:p>
-                  </a:txBody>
-                  <a:tcPr/>
-                </a:tc>
-              </a:tr>
-              <a:tr h="731520">
-                <a:tc>
-                  <a:txBody>
-                    <a:bodyPr/>
-                    <a:lstStyle/>
-                    <a:p>
-                      <a:pPr>
-                        <a:defRPr sz="1200">
-                          <a:solidFill>
-                            <a:srgbClr val="333333"/>
-                          </a:solidFill>
-                        </a:defRPr>
-                      </a:pPr>
-                      <a:r>
-                        <a:t>20미 이상 (소과)</a:t>
-                      </a:r>
-                    </a:p>
-                  </a:txBody>
-                  <a:tcPr/>
-                </a:tc>
-                <a:tc>
-                  <a:txBody>
-                    <a:bodyPr/>
-                    <a:lstStyle/>
-                    <a:p>
-                      <a:pPr>
-                        <a:defRPr sz="1200">
-                          <a:solidFill>
-                            <a:srgbClr val="333333"/>
-                          </a:solidFill>
-                        </a:defRPr>
-                      </a:pPr>
-                      <a:r>
-                        <a:t>50g 미만</a:t>
-                      </a:r>
-                    </a:p>
-                  </a:txBody>
-                  <a:tcPr/>
-                </a:tc>
-                <a:tc>
-                  <a:txBody>
-                    <a:bodyPr/>
-                    <a:lstStyle/>
-                    <a:p>
-                      <a:pPr>
-                        <a:defRPr sz="1200">
-                          <a:solidFill>
-                            <a:srgbClr val="333333"/>
-                          </a:solidFill>
-                        </a:defRPr>
-                      </a:pPr>
-                      <a:r>
-                        <a:t>한국, 중국</a:t>
-                      </a:r>
-                    </a:p>
-                  </a:txBody>
-                  <a:tcPr/>
-                </a:tc>
-                <a:tc>
-                  <a:txBody>
-                    <a:bodyPr/>
-                    <a:lstStyle/>
-                    <a:p>
-                      <a:pPr>
-                        <a:defRPr sz="1200">
-                          <a:solidFill>
-                            <a:srgbClr val="333333"/>
-                          </a:solidFill>
-                        </a:defRPr>
-                      </a:pPr>
-                      <a:r>
-                        <a:t>$18.0 ~ $22.0</a:t>
-                      </a:r>
-                    </a:p>
-                  </a:txBody>
-                  <a:tcPr/>
-                </a:tc>
-                <a:tc>
-                  <a:txBody>
-                    <a:bodyPr/>
-                    <a:lstStyle/>
-                    <a:p>
-                      <a:pPr>
-                        <a:defRPr sz="1200">
-                          <a:solidFill>
-                            <a:srgbClr val="333333"/>
-                          </a:solidFill>
-                        </a:defRPr>
-                      </a:pPr>
-                      <a:r>
-                        <a:t>통조림 가공, HMR 가공</a:t>
-                      </a:r>
-                    </a:p>
-                  </a:txBody>
-                  <a:tcPr/>
-                </a:tc>
-                <a:tc>
-                  <a:txBody>
-                    <a:bodyPr/>
-                    <a:lstStyle/>
-                    <a:p>
-                      <a:pPr>
-                        <a:defRPr sz="1200">
-                          <a:solidFill>
-                            <a:srgbClr val="333333"/>
-                          </a:solidFill>
-                        </a:defRPr>
-                      </a:pPr>
-                      <a:r>
-                        <a:t>통조림 FDA 승인 공장 연동</a:t>
-                      </a:r>
-                    </a:p>
-                  </a:txBody>
-                  <a:tcPr/>
-                </a:tc>
-              </a:tr>
-            </a:tbl>
-          </a:graphicData>
-        </a:graphic>
-      </p:graphicFrame>
-    </p:spTree>
-  </p:cSld>
-  <p:clrMapOvr>
-    <a:masterClrMapping/>
-  </p:clrMapOvr>
-</p:sld>
-</file>
-
-<file path=ppt/slides/slide3.xml><?xml version="1.0" encoding="utf-8"?>
-<p:sld xmlns:a="http://schemas.openxmlformats.org/drawingml/2006/main" xmlns:p="http://schemas.openxmlformats.org/presentationml/2006/main" xmlns:r="http://schemas.openxmlformats.org/officeDocument/2006/relationships">
-  <p:cSld>
-    <p:spTree>
-      <p:nvGrpSpPr>
-        <p:cNvPr id="1" name=""/>
-        <p:cNvGrpSpPr/>
-        <p:nvPr/>
-      </p:nvGrpSpPr>
-      <p:grpSpPr/>
-      <p:sp>
-        <p:nvSpPr>
-          <p:cNvPr id="2" name="TextBox 1"/>
-          <p:cNvSpPr txBox="1"/>
-          <p:nvPr/>
-        </p:nvSpPr>
-        <p:spPr>
-          <a:xfrm>
-            <a:off x="731520" y="365760"/>
-            <a:ext cx="10698480" cy="731520"/>
-          </a:xfrm>
-          <a:prstGeom prst="rect">
-            <a:avLst/>
-          </a:prstGeom>
-          <a:noFill/>
-        </p:spPr>
-        <p:txBody>
-          <a:bodyPr wrap="none">
-            <a:spAutoFit/>
-          </a:bodyPr>
-          <a:lstStyle/>
-          <a:p>
-            <a:pPr>
-              <a:defRPr b="1" sz="2400">
-                <a:solidFill>
-                  <a:srgbClr val="1F497D"/>
-                </a:solidFill>
-              </a:defRPr>
-            </a:pPr>
-            <a:r>
-              <a:t>📊 1. 연도별 무역액 추이</a:t>
+              <a:t>📊 13. 시장 집중도(HHI Index) 추이</a:t>
             </a:r>
           </a:p>
         </p:txBody>
       </p:sp>
       <p:pic>
         <p:nvPicPr>
-          <p:cNvPr id="3" name="Picture 2" descr="01_annual_trade_trend.png"/>
+          <p:cNvPr id="3" name="Picture 2" descr="13_hhi_index_trend.png"/>
           <p:cNvPicPr>
             <a:picLocks noChangeAspect="1"/>
           </p:cNvPicPr>
@@ -4836,7 +3898,7 @@
 </p:sld>
 </file>
 
-<file path=ppt/slides/slide4.xml><?xml version="1.0" encoding="utf-8"?>
+<file path=ppt/slides/slide19.xml><?xml version="1.0" encoding="utf-8"?>
 <p:sld xmlns:a="http://schemas.openxmlformats.org/drawingml/2006/main" xmlns:p="http://schemas.openxmlformats.org/presentationml/2006/main" xmlns:r="http://schemas.openxmlformats.org/officeDocument/2006/relationships">
   <p:cSld>
     <p:spTree>
@@ -4876,14 +3938,14 @@
               </a:defRPr>
             </a:pPr>
             <a:r>
-              <a:t>📊 2. TOP 10 주요 수출국 무역액</a:t>
+              <a:t>📊 14. 미수(Size) 규격별 가격 구조</a:t>
             </a:r>
           </a:p>
         </p:txBody>
       </p:sp>
       <p:pic>
         <p:nvPicPr>
-          <p:cNvPr id="3" name="Picture 2" descr="02_top_exporter_ranking.png"/>
+          <p:cNvPr id="3" name="Picture 2" descr="14_size_pricing_structure.png"/>
           <p:cNvPicPr>
             <a:picLocks noChangeAspect="1"/>
           </p:cNvPicPr>
@@ -4913,7 +3975,690 @@
 </p:sld>
 </file>
 
-<file path=ppt/slides/slide5.xml><?xml version="1.0" encoding="utf-8"?>
+<file path=ppt/slides/slide2.xml><?xml version="1.0" encoding="utf-8"?>
+<p:sld xmlns:a="http://schemas.openxmlformats.org/drawingml/2006/main" xmlns:p="http://schemas.openxmlformats.org/presentationml/2006/main" xmlns:r="http://schemas.openxmlformats.org/officeDocument/2006/relationships">
+  <p:cSld>
+    <p:spTree>
+      <p:nvGrpSpPr>
+        <p:cNvPr id="1" name=""/>
+        <p:cNvGrpSpPr/>
+        <p:nvPr/>
+      </p:nvGrpSpPr>
+      <p:grpSpPr/>
+      <p:sp>
+        <p:nvSpPr>
+          <p:cNvPr id="2" name="TextBox 1"/>
+          <p:cNvSpPr txBox="1"/>
+          <p:nvPr/>
+        </p:nvSpPr>
+        <p:spPr>
+          <a:xfrm>
+            <a:off x="731520" y="457200"/>
+            <a:ext cx="10698480" cy="914400"/>
+          </a:xfrm>
+          <a:prstGeom prst="rect">
+            <a:avLst/>
+          </a:prstGeom>
+          <a:noFill/>
+        </p:spPr>
+        <p:txBody>
+          <a:bodyPr wrap="none">
+            <a:spAutoFit/>
+          </a:bodyPr>
+          <a:lstStyle/>
+          <a:p>
+            <a:pPr>
+              <a:defRPr b="1" sz="2400">
+                <a:solidFill>
+                  <a:srgbClr val="1F497D"/>
+                </a:solidFill>
+              </a:defRPr>
+            </a:pPr>
+            <a:r>
+              <a:t>📌 Executive Summary: 미수(Size)별 가격 구조</a:t>
+            </a:r>
+          </a:p>
+        </p:txBody>
+      </p:sp>
+      <p:graphicFrame>
+        <p:nvGraphicFramePr>
+          <p:cNvPr id="3" name="Table 2"/>
+          <p:cNvGraphicFramePr>
+            <a:graphicFrameLocks noGrp="1"/>
+          </p:cNvGraphicFramePr>
+          <p:nvPr/>
+        </p:nvGraphicFramePr>
+        <p:xfrm>
+          <a:off x="731520" y="1645920"/>
+          <a:ext cx="10698480" cy="4389120"/>
+        </p:xfrm>
+        <a:graphic>
+          <a:graphicData uri="http://schemas.openxmlformats.org/drawingml/2006/table">
+            <a:tbl>
+              <a:tblPr firstRow="1" bandRow="1">
+                <a:tableStyleId>{5C22544A-7EE6-4342-B048-85BDC9FD1C3A}</a:tableStyleId>
+              </a:tblPr>
+              <a:tblGrid>
+                <a:gridCol w="1783080"/>
+                <a:gridCol w="1783080"/>
+                <a:gridCol w="1783080"/>
+                <a:gridCol w="1783080"/>
+                <a:gridCol w="1783080"/>
+                <a:gridCol w="1783080"/>
+              </a:tblGrid>
+              <a:tr h="731520">
+                <a:tc>
+                  <a:txBody>
+                    <a:bodyPr/>
+                    <a:lstStyle/>
+                    <a:p>
+                      <a:pPr>
+                        <a:defRPr sz="1200" b="1">
+                          <a:solidFill>
+                            <a:srgbClr val="FFFFFF"/>
+                          </a:solidFill>
+                        </a:defRPr>
+                      </a:pPr>
+                      <a:r>
+                        <a:t>품목 규격 / 미수</a:t>
+                      </a:r>
+                    </a:p>
+                  </a:txBody>
+                  <a:tcPr>
+                    <a:solidFill>
+                      <a:srgbClr val="1F497D"/>
+                    </a:solidFill>
+                  </a:tcPr>
+                </a:tc>
+                <a:tc>
+                  <a:txBody>
+                    <a:bodyPr/>
+                    <a:lstStyle/>
+                    <a:p>
+                      <a:pPr>
+                        <a:defRPr sz="1200" b="1">
+                          <a:solidFill>
+                            <a:srgbClr val="FFFFFF"/>
+                          </a:solidFill>
+                        </a:defRPr>
+                      </a:pPr>
+                      <a:r>
+                        <a:t>마리당 중량</a:t>
+                      </a:r>
+                    </a:p>
+                  </a:txBody>
+                  <a:tcPr>
+                    <a:solidFill>
+                      <a:srgbClr val="1F497D"/>
+                    </a:solidFill>
+                  </a:tcPr>
+                </a:tc>
+                <a:tc>
+                  <a:txBody>
+                    <a:bodyPr/>
+                    <a:lstStyle/>
+                    <a:p>
+                      <a:pPr>
+                        <a:defRPr sz="1200" b="1">
+                          <a:solidFill>
+                            <a:srgbClr val="FFFFFF"/>
+                          </a:solidFill>
+                        </a:defRPr>
+                      </a:pPr>
+                      <a:r>
+                        <a:t>주요 수출국</a:t>
+                      </a:r>
+                    </a:p>
+                  </a:txBody>
+                  <a:tcPr>
+                    <a:solidFill>
+                      <a:srgbClr val="1F497D"/>
+                    </a:solidFill>
+                  </a:tcPr>
+                </a:tc>
+                <a:tc>
+                  <a:txBody>
+                    <a:bodyPr/>
+                    <a:lstStyle/>
+                    <a:p>
+                      <a:pPr>
+                        <a:defRPr sz="1200" b="1">
+                          <a:solidFill>
+                            <a:srgbClr val="FFFFFF"/>
+                          </a:solidFill>
+                        </a:defRPr>
+                      </a:pPr>
+                      <a:r>
+                        <a:t>평균 단가</a:t>
+                      </a:r>
+                    </a:p>
+                  </a:txBody>
+                  <a:tcPr>
+                    <a:solidFill>
+                      <a:srgbClr val="1F497D"/>
+                    </a:solidFill>
+                  </a:tcPr>
+                </a:tc>
+                <a:tc>
+                  <a:txBody>
+                    <a:bodyPr/>
+                    <a:lstStyle/>
+                    <a:p>
+                      <a:pPr>
+                        <a:defRPr sz="1200" b="1">
+                          <a:solidFill>
+                            <a:srgbClr val="FFFFFF"/>
+                          </a:solidFill>
+                        </a:defRPr>
+                      </a:pPr>
+                      <a:r>
+                        <a:t>주요 타깃 시장</a:t>
+                      </a:r>
+                    </a:p>
+                  </a:txBody>
+                  <a:tcPr>
+                    <a:solidFill>
+                      <a:srgbClr val="1F497D"/>
+                    </a:solidFill>
+                  </a:tcPr>
+                </a:tc>
+                <a:tc>
+                  <a:txBody>
+                    <a:bodyPr/>
+                    <a:lstStyle/>
+                    <a:p>
+                      <a:pPr>
+                        <a:defRPr sz="1200" b="1">
+                          <a:solidFill>
+                            <a:srgbClr val="FFFFFF"/>
+                          </a:solidFill>
+                        </a:defRPr>
+                      </a:pPr>
+                      <a:r>
+                        <a:t>소싱 추천 포인트</a:t>
+                      </a:r>
+                    </a:p>
+                  </a:txBody>
+                  <a:tcPr>
+                    <a:solidFill>
+                      <a:srgbClr val="1F497D"/>
+                    </a:solidFill>
+                  </a:tcPr>
+                </a:tc>
+              </a:tr>
+              <a:tr h="731520">
+                <a:tc>
+                  <a:txBody>
+                    <a:bodyPr/>
+                    <a:lstStyle/>
+                    <a:p>
+                      <a:pPr>
+                        <a:defRPr sz="1200"/>
+                      </a:pPr>
+                      <a:r>
+                        <a:t>10미 미만 (대과)</a:t>
+                      </a:r>
+                    </a:p>
+                  </a:txBody>
+                  <a:tcPr/>
+                </a:tc>
+                <a:tc>
+                  <a:txBody>
+                    <a:bodyPr/>
+                    <a:lstStyle/>
+                    <a:p>
+                      <a:pPr>
+                        <a:defRPr sz="1200"/>
+                      </a:pPr>
+                      <a:r>
+                        <a:t>100g 이상</a:t>
+                      </a:r>
+                    </a:p>
+                  </a:txBody>
+                  <a:tcPr/>
+                </a:tc>
+                <a:tc>
+                  <a:txBody>
+                    <a:bodyPr/>
+                    <a:lstStyle/>
+                    <a:p>
+                      <a:pPr>
+                        <a:defRPr sz="1200"/>
+                      </a:pPr>
+                      <a:r>
+                        <a:t>한국 완도, 호주</a:t>
+                      </a:r>
+                    </a:p>
+                  </a:txBody>
+                  <a:tcPr/>
+                </a:tc>
+                <a:tc>
+                  <a:txBody>
+                    <a:bodyPr/>
+                    <a:lstStyle/>
+                    <a:p>
+                      <a:pPr>
+                        <a:defRPr sz="1200"/>
+                      </a:pPr>
+                      <a:r>
+                        <a:t>$42.0 ~ $48.0</a:t>
+                      </a:r>
+                    </a:p>
+                  </a:txBody>
+                  <a:tcPr/>
+                </a:tc>
+                <a:tc>
+                  <a:txBody>
+                    <a:bodyPr/>
+                    <a:lstStyle/>
+                    <a:p>
+                      <a:pPr>
+                        <a:defRPr sz="1200"/>
+                      </a:pPr>
+                      <a:r>
+                        <a:t>일본 고급 일식집, 료칸</a:t>
+                      </a:r>
+                    </a:p>
+                  </a:txBody>
+                  <a:tcPr/>
+                </a:tc>
+                <a:tc>
+                  <a:txBody>
+                    <a:bodyPr/>
+                    <a:lstStyle/>
+                    <a:p>
+                      <a:pPr>
+                        <a:defRPr sz="1200"/>
+                      </a:pPr>
+                      <a:r>
+                        <a:t>고급 항공직송 프리미엄 오퍼</a:t>
+                      </a:r>
+                    </a:p>
+                  </a:txBody>
+                  <a:tcPr/>
+                </a:tc>
+              </a:tr>
+              <a:tr h="731520">
+                <a:tc>
+                  <a:txBody>
+                    <a:bodyPr/>
+                    <a:lstStyle/>
+                    <a:p>
+                      <a:pPr>
+                        <a:defRPr sz="1200"/>
+                      </a:pPr>
+                      <a:r>
+                        <a:t>10 ~ 12미 (중대과)</a:t>
+                      </a:r>
+                    </a:p>
+                  </a:txBody>
+                  <a:tcPr/>
+                </a:tc>
+                <a:tc>
+                  <a:txBody>
+                    <a:bodyPr/>
+                    <a:lstStyle/>
+                    <a:p>
+                      <a:pPr>
+                        <a:defRPr sz="1200"/>
+                      </a:pPr>
+                      <a:r>
+                        <a:t>80g ~ 100g</a:t>
+                      </a:r>
+                    </a:p>
+                  </a:txBody>
+                  <a:tcPr/>
+                </a:tc>
+                <a:tc>
+                  <a:txBody>
+                    <a:bodyPr/>
+                    <a:lstStyle/>
+                    <a:p>
+                      <a:pPr>
+                        <a:defRPr sz="1200"/>
+                      </a:pPr>
+                      <a:r>
+                        <a:t>한국 완도</a:t>
+                      </a:r>
+                    </a:p>
+                  </a:txBody>
+                  <a:tcPr/>
+                </a:tc>
+                <a:tc>
+                  <a:txBody>
+                    <a:bodyPr/>
+                    <a:lstStyle/>
+                    <a:p>
+                      <a:pPr>
+                        <a:defRPr sz="1200"/>
+                      </a:pPr>
+                      <a:r>
+                        <a:t>$36.0 ~ $40.0</a:t>
+                      </a:r>
+                    </a:p>
+                  </a:txBody>
+                  <a:tcPr/>
+                </a:tc>
+                <a:tc>
+                  <a:txBody>
+                    <a:bodyPr/>
+                    <a:lstStyle/>
+                    <a:p>
+                      <a:pPr>
+                        <a:defRPr sz="1200"/>
+                      </a:pPr>
+                      <a:r>
+                        <a:t>도쿄 도요스 시장 도매상사</a:t>
+                      </a:r>
+                    </a:p>
+                  </a:txBody>
+                  <a:tcPr/>
+                </a:tc>
+                <a:tc>
+                  <a:txBody>
+                    <a:bodyPr/>
+                    <a:lstStyle/>
+                    <a:p>
+                      <a:pPr>
+                        <a:defRPr sz="1200"/>
+                      </a:pPr>
+                      <a:r>
+                        <a:t>메인 수출 주력 미수 1차 상사</a:t>
+                      </a:r>
+                    </a:p>
+                  </a:txBody>
+                  <a:tcPr/>
+                </a:tc>
+              </a:tr>
+              <a:tr h="731520">
+                <a:tc>
+                  <a:txBody>
+                    <a:bodyPr/>
+                    <a:lstStyle/>
+                    <a:p>
+                      <a:pPr>
+                        <a:defRPr sz="1200"/>
+                      </a:pPr>
+                      <a:r>
+                        <a:t>13 ~ 15미 (중과)</a:t>
+                      </a:r>
+                    </a:p>
+                  </a:txBody>
+                  <a:tcPr/>
+                </a:tc>
+                <a:tc>
+                  <a:txBody>
+                    <a:bodyPr/>
+                    <a:lstStyle/>
+                    <a:p>
+                      <a:pPr>
+                        <a:defRPr sz="1200"/>
+                      </a:pPr>
+                      <a:r>
+                        <a:t>65g ~ 80g</a:t>
+                      </a:r>
+                    </a:p>
+                  </a:txBody>
+                  <a:tcPr/>
+                </a:tc>
+                <a:tc>
+                  <a:txBody>
+                    <a:bodyPr/>
+                    <a:lstStyle/>
+                    <a:p>
+                      <a:pPr>
+                        <a:defRPr sz="1200"/>
+                      </a:pPr>
+                      <a:r>
+                        <a:t>한국, 중국</a:t>
+                      </a:r>
+                    </a:p>
+                  </a:txBody>
+                  <a:tcPr/>
+                </a:tc>
+                <a:tc>
+                  <a:txBody>
+                    <a:bodyPr/>
+                    <a:lstStyle/>
+                    <a:p>
+                      <a:pPr>
+                        <a:defRPr sz="1200"/>
+                      </a:pPr>
+                      <a:r>
+                        <a:t>$30.0 ~ $34.0</a:t>
+                      </a:r>
+                    </a:p>
+                  </a:txBody>
+                  <a:tcPr/>
+                </a:tc>
+                <a:tc>
+                  <a:txBody>
+                    <a:bodyPr/>
+                    <a:lstStyle/>
+                    <a:p>
+                      <a:pPr>
+                        <a:defRPr sz="1200"/>
+                      </a:pPr>
+                      <a:r>
+                        <a:t>관서 레스토랑, 아시안 마트</a:t>
+                      </a:r>
+                    </a:p>
+                  </a:txBody>
+                  <a:tcPr/>
+                </a:tc>
+                <a:tc>
+                  <a:txBody>
+                    <a:bodyPr/>
+                    <a:lstStyle/>
+                    <a:p>
+                      <a:pPr>
+                        <a:defRPr sz="1200"/>
+                      </a:pPr>
+                      <a:r>
+                        <a:t>H-Mart, 99 Ranch 채널 공급</a:t>
+                      </a:r>
+                    </a:p>
+                  </a:txBody>
+                  <a:tcPr/>
+                </a:tc>
+              </a:tr>
+              <a:tr h="731520">
+                <a:tc>
+                  <a:txBody>
+                    <a:bodyPr/>
+                    <a:lstStyle/>
+                    <a:p>
+                      <a:pPr>
+                        <a:defRPr sz="1200"/>
+                      </a:pPr>
+                      <a:r>
+                        <a:t>15 ~ 20미 (중소과)</a:t>
+                      </a:r>
+                    </a:p>
+                  </a:txBody>
+                  <a:tcPr/>
+                </a:tc>
+                <a:tc>
+                  <a:txBody>
+                    <a:bodyPr/>
+                    <a:lstStyle/>
+                    <a:p>
+                      <a:pPr>
+                        <a:defRPr sz="1200"/>
+                      </a:pPr>
+                      <a:r>
+                        <a:t>50g ~ 65g</a:t>
+                      </a:r>
+                    </a:p>
+                  </a:txBody>
+                  <a:tcPr/>
+                </a:tc>
+                <a:tc>
+                  <a:txBody>
+                    <a:bodyPr/>
+                    <a:lstStyle/>
+                    <a:p>
+                      <a:pPr>
+                        <a:defRPr sz="1200"/>
+                      </a:pPr>
+                      <a:r>
+                        <a:t>한국, 베트남</a:t>
+                      </a:r>
+                    </a:p>
+                  </a:txBody>
+                  <a:tcPr/>
+                </a:tc>
+                <a:tc>
+                  <a:txBody>
+                    <a:bodyPr/>
+                    <a:lstStyle/>
+                    <a:p>
+                      <a:pPr>
+                        <a:defRPr sz="1200"/>
+                      </a:pPr>
+                      <a:r>
+                        <a:t>$24.0 ~ $28.0</a:t>
+                      </a:r>
+                    </a:p>
+                  </a:txBody>
+                  <a:tcPr/>
+                </a:tc>
+                <a:tc>
+                  <a:txBody>
+                    <a:bodyPr/>
+                    <a:lstStyle/>
+                    <a:p>
+                      <a:pPr>
+                        <a:defRPr sz="1200"/>
+                      </a:pPr>
+                      <a:r>
+                        <a:t>냉동 IQF 가공, 외식 체인</a:t>
+                      </a:r>
+                    </a:p>
+                  </a:txBody>
+                  <a:tcPr/>
+                </a:tc>
+                <a:tc>
+                  <a:txBody>
+                    <a:bodyPr/>
+                    <a:lstStyle/>
+                    <a:p>
+                      <a:pPr>
+                        <a:defRPr sz="1200"/>
+                      </a:pPr>
+                      <a:r>
+                        <a:t>해상 IQF 컨테이너 대량 공급</a:t>
+                      </a:r>
+                    </a:p>
+                  </a:txBody>
+                  <a:tcPr/>
+                </a:tc>
+              </a:tr>
+              <a:tr h="731520">
+                <a:tc>
+                  <a:txBody>
+                    <a:bodyPr/>
+                    <a:lstStyle/>
+                    <a:p>
+                      <a:pPr>
+                        <a:defRPr sz="1200"/>
+                      </a:pPr>
+                      <a:r>
+                        <a:t>20미 이상 (소과)</a:t>
+                      </a:r>
+                    </a:p>
+                  </a:txBody>
+                  <a:tcPr/>
+                </a:tc>
+                <a:tc>
+                  <a:txBody>
+                    <a:bodyPr/>
+                    <a:lstStyle/>
+                    <a:p>
+                      <a:pPr>
+                        <a:defRPr sz="1200"/>
+                      </a:pPr>
+                      <a:r>
+                        <a:t>50g 미만</a:t>
+                      </a:r>
+                    </a:p>
+                  </a:txBody>
+                  <a:tcPr/>
+                </a:tc>
+                <a:tc>
+                  <a:txBody>
+                    <a:bodyPr/>
+                    <a:lstStyle/>
+                    <a:p>
+                      <a:pPr>
+                        <a:defRPr sz="1200"/>
+                      </a:pPr>
+                      <a:r>
+                        <a:t>한국, 중국</a:t>
+                      </a:r>
+                    </a:p>
+                  </a:txBody>
+                  <a:tcPr/>
+                </a:tc>
+                <a:tc>
+                  <a:txBody>
+                    <a:bodyPr/>
+                    <a:lstStyle/>
+                    <a:p>
+                      <a:pPr>
+                        <a:defRPr sz="1200"/>
+                      </a:pPr>
+                      <a:r>
+                        <a:t>$18.0 ~ $22.0</a:t>
+                      </a:r>
+                    </a:p>
+                  </a:txBody>
+                  <a:tcPr/>
+                </a:tc>
+                <a:tc>
+                  <a:txBody>
+                    <a:bodyPr/>
+                    <a:lstStyle/>
+                    <a:p>
+                      <a:pPr>
+                        <a:defRPr sz="1200"/>
+                      </a:pPr>
+                      <a:r>
+                        <a:t>통조림 가공, HMR 가공</a:t>
+                      </a:r>
+                    </a:p>
+                  </a:txBody>
+                  <a:tcPr/>
+                </a:tc>
+                <a:tc>
+                  <a:txBody>
+                    <a:bodyPr/>
+                    <a:lstStyle/>
+                    <a:p>
+                      <a:pPr>
+                        <a:defRPr sz="1200"/>
+                      </a:pPr>
+                      <a:r>
+                        <a:t>통조림 FDA 승인 공장 연동</a:t>
+                      </a:r>
+                    </a:p>
+                  </a:txBody>
+                  <a:tcPr/>
+                </a:tc>
+              </a:tr>
+            </a:tbl>
+          </a:graphicData>
+        </a:graphic>
+      </p:graphicFrame>
+    </p:spTree>
+  </p:cSld>
+  <p:clrMapOvr>
+    <a:masterClrMapping/>
+  </p:clrMapOvr>
+</p:sld>
+</file>
+
+<file path=ppt/slides/slide20.xml><?xml version="1.0" encoding="utf-8"?>
 <p:sld xmlns:a="http://schemas.openxmlformats.org/drawingml/2006/main" xmlns:p="http://schemas.openxmlformats.org/presentationml/2006/main" xmlns:r="http://schemas.openxmlformats.org/officeDocument/2006/relationships">
   <p:cSld>
     <p:spTree>
@@ -4953,14 +4698,14 @@
               </a:defRPr>
             </a:pPr>
             <a:r>
-              <a:t>📊 3. TOP 10 주요 수입국 무역액</a:t>
+              <a:t>📊 15. 전복 유망 국가 시장 성숙도-단가 매트릭스</a:t>
             </a:r>
           </a:p>
         </p:txBody>
       </p:sp>
       <p:pic>
         <p:nvPicPr>
-          <p:cNvPr id="3" name="Picture 2" descr="03_top_importer_ranking.png"/>
+          <p:cNvPr id="3" name="Picture 2" descr="15_promising_country_matrix.png"/>
           <p:cNvPicPr>
             <a:picLocks noChangeAspect="1"/>
           </p:cNvPicPr>
@@ -4990,6 +4735,2913 @@
 </p:sld>
 </file>
 
+<file path=ppt/slides/slide3.xml><?xml version="1.0" encoding="utf-8"?>
+<p:sld xmlns:a="http://schemas.openxmlformats.org/drawingml/2006/main" xmlns:p="http://schemas.openxmlformats.org/presentationml/2006/main" xmlns:r="http://schemas.openxmlformats.org/officeDocument/2006/relationships">
+  <p:cSld>
+    <p:spTree>
+      <p:nvGrpSpPr>
+        <p:cNvPr id="1" name=""/>
+        <p:cNvGrpSpPr/>
+        <p:nvPr/>
+      </p:nvGrpSpPr>
+      <p:grpSpPr/>
+      <p:sp>
+        <p:nvSpPr>
+          <p:cNvPr id="2" name="TextBox 1"/>
+          <p:cNvSpPr txBox="1"/>
+          <p:nvPr/>
+        </p:nvSpPr>
+        <p:spPr>
+          <a:xfrm>
+            <a:off x="731520" y="365760"/>
+            <a:ext cx="10698480" cy="731520"/>
+          </a:xfrm>
+          <a:prstGeom prst="rect">
+            <a:avLst/>
+          </a:prstGeom>
+          <a:noFill/>
+        </p:spPr>
+        <p:txBody>
+          <a:bodyPr wrap="none">
+            <a:spAutoFit/>
+          </a:bodyPr>
+          <a:lstStyle/>
+          <a:p>
+            <a:pPr>
+              <a:defRPr b="1" sz="2200">
+                <a:solidFill>
+                  <a:srgbClr val="1F497D"/>
+                </a:solidFill>
+              </a:defRPr>
+            </a:pPr>
+            <a:r>
+              <a:t>🗺️ [표 1] HS 0307.81 (활/신선 전복) TOP 10 유망 국가</a:t>
+            </a:r>
+          </a:p>
+        </p:txBody>
+      </p:sp>
+      <p:graphicFrame>
+        <p:nvGraphicFramePr>
+          <p:cNvPr id="3" name="Table 2"/>
+          <p:cNvGraphicFramePr>
+            <a:graphicFrameLocks noGrp="1"/>
+          </p:cNvGraphicFramePr>
+          <p:nvPr/>
+        </p:nvGraphicFramePr>
+        <p:xfrm>
+          <a:off x="731520" y="1188720"/>
+          <a:ext cx="10698480" cy="5212080"/>
+        </p:xfrm>
+        <a:graphic>
+          <a:graphicData uri="http://schemas.openxmlformats.org/drawingml/2006/table">
+            <a:tbl>
+              <a:tblPr firstRow="1" bandRow="1">
+                <a:tableStyleId>{5C22544A-7EE6-4342-B048-85BDC9FD1C3A}</a:tableStyleId>
+              </a:tblPr>
+              <a:tblGrid>
+                <a:gridCol w="2139696"/>
+                <a:gridCol w="2139696"/>
+                <a:gridCol w="2139696"/>
+                <a:gridCol w="2139696"/>
+                <a:gridCol w="2139696"/>
+              </a:tblGrid>
+              <a:tr h="473825">
+                <a:tc>
+                  <a:txBody>
+                    <a:bodyPr/>
+                    <a:lstStyle/>
+                    <a:p>
+                      <a:pPr>
+                        <a:defRPr sz="1000" b="1">
+                          <a:solidFill>
+                            <a:srgbClr val="FFFFFF"/>
+                          </a:solidFill>
+                        </a:defRPr>
+                      </a:pPr>
+                      <a:r>
+                        <a:t>유망순위</a:t>
+                      </a:r>
+                    </a:p>
+                  </a:txBody>
+                  <a:tcPr>
+                    <a:solidFill>
+                      <a:srgbClr val="1F497D"/>
+                    </a:solidFill>
+                  </a:tcPr>
+                </a:tc>
+                <a:tc>
+                  <a:txBody>
+                    <a:bodyPr/>
+                    <a:lstStyle/>
+                    <a:p>
+                      <a:pPr>
+                        <a:defRPr sz="1000" b="1">
+                          <a:solidFill>
+                            <a:srgbClr val="FFFFFF"/>
+                          </a:solidFill>
+                        </a:defRPr>
+                      </a:pPr>
+                      <a:r>
+                        <a:t>타깃 국가</a:t>
+                      </a:r>
+                    </a:p>
+                  </a:txBody>
+                  <a:tcPr>
+                    <a:solidFill>
+                      <a:srgbClr val="1F497D"/>
+                    </a:solidFill>
+                  </a:tcPr>
+                </a:tc>
+                <a:tc>
+                  <a:txBody>
+                    <a:bodyPr/>
+                    <a:lstStyle/>
+                    <a:p>
+                      <a:pPr>
+                        <a:defRPr sz="1000" b="1">
+                          <a:solidFill>
+                            <a:srgbClr val="FFFFFF"/>
+                          </a:solidFill>
+                        </a:defRPr>
+                      </a:pPr>
+                      <a:r>
+                        <a:t>무역액 점유율</a:t>
+                      </a:r>
+                    </a:p>
+                  </a:txBody>
+                  <a:tcPr>
+                    <a:solidFill>
+                      <a:srgbClr val="1F497D"/>
+                    </a:solidFill>
+                  </a:tcPr>
+                </a:tc>
+                <a:tc>
+                  <a:txBody>
+                    <a:bodyPr/>
+                    <a:lstStyle/>
+                    <a:p>
+                      <a:pPr>
+                        <a:defRPr sz="1000" b="1">
+                          <a:solidFill>
+                            <a:srgbClr val="FFFFFF"/>
+                          </a:solidFill>
+                        </a:defRPr>
+                      </a:pPr>
+                      <a:r>
+                        <a:t>컨택 파트너 종류</a:t>
+                      </a:r>
+                    </a:p>
+                  </a:txBody>
+                  <a:tcPr>
+                    <a:solidFill>
+                      <a:srgbClr val="1F497D"/>
+                    </a:solidFill>
+                  </a:tcPr>
+                </a:tc>
+                <a:tc>
+                  <a:txBody>
+                    <a:bodyPr/>
+                    <a:lstStyle/>
+                    <a:p>
+                      <a:pPr>
+                        <a:defRPr sz="1000" b="1">
+                          <a:solidFill>
+                            <a:srgbClr val="FFFFFF"/>
+                          </a:solidFill>
+                        </a:defRPr>
+                      </a:pPr>
+                      <a:r>
+                        <a:t>시장개척 포인트</a:t>
+                      </a:r>
+                    </a:p>
+                  </a:txBody>
+                  <a:tcPr>
+                    <a:solidFill>
+                      <a:srgbClr val="1F497D"/>
+                    </a:solidFill>
+                  </a:tcPr>
+                </a:tc>
+              </a:tr>
+              <a:tr h="473825">
+                <a:tc>
+                  <a:txBody>
+                    <a:bodyPr/>
+                    <a:lstStyle/>
+                    <a:p>
+                      <a:pPr>
+                        <a:defRPr sz="1000"/>
+                      </a:pPr>
+                      <a:r>
+                        <a:t>1위</a:t>
+                      </a:r>
+                    </a:p>
+                  </a:txBody>
+                  <a:tcPr/>
+                </a:tc>
+                <a:tc>
+                  <a:txBody>
+                    <a:bodyPr/>
+                    <a:lstStyle/>
+                    <a:p>
+                      <a:pPr>
+                        <a:defRPr sz="1000"/>
+                      </a:pPr>
+                      <a:r>
+                        <a:t>일본 (Japan)</a:t>
+                      </a:r>
+                    </a:p>
+                  </a:txBody>
+                  <a:tcPr/>
+                </a:tc>
+                <a:tc>
+                  <a:txBody>
+                    <a:bodyPr/>
+                    <a:lstStyle/>
+                    <a:p>
+                      <a:pPr>
+                        <a:defRPr sz="1000"/>
+                      </a:pPr>
+                      <a:r>
+                        <a:t>35.4%</a:t>
+                      </a:r>
+                    </a:p>
+                  </a:txBody>
+                  <a:tcPr/>
+                </a:tc>
+                <a:tc>
+                  <a:txBody>
+                    <a:bodyPr/>
+                    <a:lstStyle/>
+                    <a:p>
+                      <a:pPr>
+                        <a:defRPr sz="1000"/>
+                      </a:pPr>
+                      <a:r>
+                        <a:t>도쿄 도요스 시장 수산물 수입 도매상사</a:t>
+                      </a:r>
+                    </a:p>
+                  </a:txBody>
+                  <a:tcPr/>
+                </a:tc>
+                <a:tc>
+                  <a:txBody>
+                    <a:bodyPr/>
+                    <a:lstStyle/>
+                    <a:p>
+                      <a:pPr>
+                        <a:defRPr sz="1000"/>
+                      </a:pPr>
+                      <a:r>
+                        <a:t>완도산 활전복 페리/항공 직송 공급</a:t>
+                      </a:r>
+                    </a:p>
+                  </a:txBody>
+                  <a:tcPr/>
+                </a:tc>
+              </a:tr>
+              <a:tr h="473825">
+                <a:tc>
+                  <a:txBody>
+                    <a:bodyPr/>
+                    <a:lstStyle/>
+                    <a:p>
+                      <a:pPr>
+                        <a:defRPr sz="1000"/>
+                      </a:pPr>
+                      <a:r>
+                        <a:t>2위</a:t>
+                      </a:r>
+                    </a:p>
+                  </a:txBody>
+                  <a:tcPr/>
+                </a:tc>
+                <a:tc>
+                  <a:txBody>
+                    <a:bodyPr/>
+                    <a:lstStyle/>
+                    <a:p>
+                      <a:pPr>
+                        <a:defRPr sz="1000"/>
+                      </a:pPr>
+                      <a:r>
+                        <a:t>중국 (China)</a:t>
+                      </a:r>
+                    </a:p>
+                  </a:txBody>
+                  <a:tcPr/>
+                </a:tc>
+                <a:tc>
+                  <a:txBody>
+                    <a:bodyPr/>
+                    <a:lstStyle/>
+                    <a:p>
+                      <a:pPr>
+                        <a:defRPr sz="1000"/>
+                      </a:pPr>
+                      <a:r>
+                        <a:t>24.1%</a:t>
+                      </a:r>
+                    </a:p>
+                  </a:txBody>
+                  <a:tcPr/>
+                </a:tc>
+                <a:tc>
+                  <a:txBody>
+                    <a:bodyPr/>
+                    <a:lstStyle/>
+                    <a:p>
+                      <a:pPr>
+                        <a:defRPr sz="1000"/>
+                      </a:pPr>
+                      <a:r>
+                        <a:t>동해안 수산물 수입 및 유통 상사</a:t>
+                      </a:r>
+                    </a:p>
+                  </a:txBody>
+                  <a:tcPr/>
+                </a:tc>
+                <a:tc>
+                  <a:txBody>
+                    <a:bodyPr/>
+                    <a:lstStyle/>
+                    <a:p>
+                      <a:pPr>
+                        <a:defRPr sz="1000"/>
+                      </a:pPr>
+                      <a:r>
+                        <a:t>산둥성/상하이 고급 호텔 체인 공급</a:t>
+                      </a:r>
+                    </a:p>
+                  </a:txBody>
+                  <a:tcPr/>
+                </a:tc>
+              </a:tr>
+              <a:tr h="473825">
+                <a:tc>
+                  <a:txBody>
+                    <a:bodyPr/>
+                    <a:lstStyle/>
+                    <a:p>
+                      <a:pPr>
+                        <a:defRPr sz="1000"/>
+                      </a:pPr>
+                      <a:r>
+                        <a:t>3위</a:t>
+                      </a:r>
+                    </a:p>
+                  </a:txBody>
+                  <a:tcPr/>
+                </a:tc>
+                <a:tc>
+                  <a:txBody>
+                    <a:bodyPr/>
+                    <a:lstStyle/>
+                    <a:p>
+                      <a:pPr>
+                        <a:defRPr sz="1000"/>
+                      </a:pPr>
+                      <a:r>
+                        <a:t>홍콩 (Hong Kong)</a:t>
+                      </a:r>
+                    </a:p>
+                  </a:txBody>
+                  <a:tcPr/>
+                </a:tc>
+                <a:tc>
+                  <a:txBody>
+                    <a:bodyPr/>
+                    <a:lstStyle/>
+                    <a:p>
+                      <a:pPr>
+                        <a:defRPr sz="1000"/>
+                      </a:pPr>
+                      <a:r>
+                        <a:t>18.2%</a:t>
+                      </a:r>
+                    </a:p>
+                  </a:txBody>
+                  <a:tcPr/>
+                </a:tc>
+                <a:tc>
+                  <a:txBody>
+                    <a:bodyPr/>
+                    <a:lstStyle/>
+                    <a:p>
+                      <a:pPr>
+                        <a:defRPr sz="1000"/>
+                      </a:pPr>
+                      <a:r>
+                        <a:t>고급 수산물 건재 시장 수입상사</a:t>
+                      </a:r>
+                    </a:p>
+                  </a:txBody>
+                  <a:tcPr/>
+                </a:tc>
+                <a:tc>
+                  <a:txBody>
+                    <a:bodyPr/>
+                    <a:lstStyle/>
+                    <a:p>
+                      <a:pPr>
+                        <a:defRPr sz="1000"/>
+                      </a:pPr>
+                      <a:r>
+                        <a:t>고급 딤섬 및 레스토랑 직송 공급</a:t>
+                      </a:r>
+                    </a:p>
+                  </a:txBody>
+                  <a:tcPr/>
+                </a:tc>
+              </a:tr>
+              <a:tr h="473825">
+                <a:tc>
+                  <a:txBody>
+                    <a:bodyPr/>
+                    <a:lstStyle/>
+                    <a:p>
+                      <a:pPr>
+                        <a:defRPr sz="1000"/>
+                      </a:pPr>
+                      <a:r>
+                        <a:t>4위</a:t>
+                      </a:r>
+                    </a:p>
+                  </a:txBody>
+                  <a:tcPr/>
+                </a:tc>
+                <a:tc>
+                  <a:txBody>
+                    <a:bodyPr/>
+                    <a:lstStyle/>
+                    <a:p>
+                      <a:pPr>
+                        <a:defRPr sz="1000"/>
+                      </a:pPr>
+                      <a:r>
+                        <a:t>대만 (Taiwan)</a:t>
+                      </a:r>
+                    </a:p>
+                  </a:txBody>
+                  <a:tcPr/>
+                </a:tc>
+                <a:tc>
+                  <a:txBody>
+                    <a:bodyPr/>
+                    <a:lstStyle/>
+                    <a:p>
+                      <a:pPr>
+                        <a:defRPr sz="1000"/>
+                      </a:pPr>
+                      <a:r>
+                        <a:t>7.5%</a:t>
+                      </a:r>
+                    </a:p>
+                  </a:txBody>
+                  <a:tcPr/>
+                </a:tc>
+                <a:tc>
+                  <a:txBody>
+                    <a:bodyPr/>
+                    <a:lstStyle/>
+                    <a:p>
+                      <a:pPr>
+                        <a:defRPr sz="1000"/>
+                      </a:pPr>
+                      <a:r>
+                        <a:t>타이베이 고급 수산물 1차 수입상</a:t>
+                      </a:r>
+                    </a:p>
+                  </a:txBody>
+                  <a:tcPr/>
+                </a:tc>
+                <a:tc>
+                  <a:txBody>
+                    <a:bodyPr/>
+                    <a:lstStyle/>
+                    <a:p>
+                      <a:pPr>
+                        <a:defRPr sz="1000"/>
+                      </a:pPr>
+                      <a:r>
+                        <a:t>일식 뷔페 및 연회장 활전복 공급</a:t>
+                      </a:r>
+                    </a:p>
+                  </a:txBody>
+                  <a:tcPr/>
+                </a:tc>
+              </a:tr>
+              <a:tr h="473825">
+                <a:tc>
+                  <a:txBody>
+                    <a:bodyPr/>
+                    <a:lstStyle/>
+                    <a:p>
+                      <a:pPr>
+                        <a:defRPr sz="1000"/>
+                      </a:pPr>
+                      <a:r>
+                        <a:t>5위</a:t>
+                      </a:r>
+                    </a:p>
+                  </a:txBody>
+                  <a:tcPr/>
+                </a:tc>
+                <a:tc>
+                  <a:txBody>
+                    <a:bodyPr/>
+                    <a:lstStyle/>
+                    <a:p>
+                      <a:pPr>
+                        <a:defRPr sz="1000"/>
+                      </a:pPr>
+                      <a:r>
+                        <a:t>미국 (USA)</a:t>
+                      </a:r>
+                    </a:p>
+                  </a:txBody>
+                  <a:tcPr/>
+                </a:tc>
+                <a:tc>
+                  <a:txBody>
+                    <a:bodyPr/>
+                    <a:lstStyle/>
+                    <a:p>
+                      <a:pPr>
+                        <a:defRPr sz="1000"/>
+                      </a:pPr>
+                      <a:r>
+                        <a:t>4.8%</a:t>
+                      </a:r>
+                    </a:p>
+                  </a:txBody>
+                  <a:tcPr/>
+                </a:tc>
+                <a:tc>
+                  <a:txBody>
+                    <a:bodyPr/>
+                    <a:lstStyle/>
+                    <a:p>
+                      <a:pPr>
+                        <a:defRPr sz="1000"/>
+                      </a:pPr>
+                      <a:r>
+                        <a:t>LA/NY 아시안 수산물 벤더</a:t>
+                      </a:r>
+                    </a:p>
+                  </a:txBody>
+                  <a:tcPr/>
+                </a:tc>
+                <a:tc>
+                  <a:txBody>
+                    <a:bodyPr/>
+                    <a:lstStyle/>
+                    <a:p>
+                      <a:pPr>
+                        <a:defRPr sz="1000"/>
+                      </a:pPr>
+                      <a:r>
+                        <a:t>한인/아시안 고소득층 항공 직송</a:t>
+                      </a:r>
+                    </a:p>
+                  </a:txBody>
+                  <a:tcPr/>
+                </a:tc>
+              </a:tr>
+              <a:tr h="473825">
+                <a:tc>
+                  <a:txBody>
+                    <a:bodyPr/>
+                    <a:lstStyle/>
+                    <a:p>
+                      <a:pPr>
+                        <a:defRPr sz="1000"/>
+                      </a:pPr>
+                      <a:r>
+                        <a:t>6위</a:t>
+                      </a:r>
+                    </a:p>
+                  </a:txBody>
+                  <a:tcPr/>
+                </a:tc>
+                <a:tc>
+                  <a:txBody>
+                    <a:bodyPr/>
+                    <a:lstStyle/>
+                    <a:p>
+                      <a:pPr>
+                        <a:defRPr sz="1000"/>
+                      </a:pPr>
+                      <a:r>
+                        <a:t>싱가포르 (Singapore)</a:t>
+                      </a:r>
+                    </a:p>
+                  </a:txBody>
+                  <a:tcPr/>
+                </a:tc>
+                <a:tc>
+                  <a:txBody>
+                    <a:bodyPr/>
+                    <a:lstStyle/>
+                    <a:p>
+                      <a:pPr>
+                        <a:defRPr sz="1000"/>
+                      </a:pPr>
+                      <a:r>
+                        <a:t>3.2%</a:t>
+                      </a:r>
+                    </a:p>
+                  </a:txBody>
+                  <a:tcPr/>
+                </a:tc>
+                <a:tc>
+                  <a:txBody>
+                    <a:bodyPr/>
+                    <a:lstStyle/>
+                    <a:p>
+                      <a:pPr>
+                        <a:defRPr sz="1000"/>
+                      </a:pPr>
+                      <a:r>
+                        <a:t>마리나 베이 외식 그룹 벤더</a:t>
+                      </a:r>
+                    </a:p>
+                  </a:txBody>
+                  <a:tcPr/>
+                </a:tc>
+                <a:tc>
+                  <a:txBody>
+                    <a:bodyPr/>
+                    <a:lstStyle/>
+                    <a:p>
+                      <a:pPr>
+                        <a:defRPr sz="1000"/>
+                      </a:pPr>
+                      <a:r>
+                        <a:t>고급 해산물 뷔페 및 호텔 공급</a:t>
+                      </a:r>
+                    </a:p>
+                  </a:txBody>
+                  <a:tcPr/>
+                </a:tc>
+              </a:tr>
+              <a:tr h="473825">
+                <a:tc>
+                  <a:txBody>
+                    <a:bodyPr/>
+                    <a:lstStyle/>
+                    <a:p>
+                      <a:pPr>
+                        <a:defRPr sz="1000"/>
+                      </a:pPr>
+                      <a:r>
+                        <a:t>7위</a:t>
+                      </a:r>
+                    </a:p>
+                  </a:txBody>
+                  <a:tcPr/>
+                </a:tc>
+                <a:tc>
+                  <a:txBody>
+                    <a:bodyPr/>
+                    <a:lstStyle/>
+                    <a:p>
+                      <a:pPr>
+                        <a:defRPr sz="1000"/>
+                      </a:pPr>
+                      <a:r>
+                        <a:t>베트남 (Vietnam)</a:t>
+                      </a:r>
+                    </a:p>
+                  </a:txBody>
+                  <a:tcPr/>
+                </a:tc>
+                <a:tc>
+                  <a:txBody>
+                    <a:bodyPr/>
+                    <a:lstStyle/>
+                    <a:p>
+                      <a:pPr>
+                        <a:defRPr sz="1000"/>
+                      </a:pPr>
+                      <a:r>
+                        <a:t>2.5%</a:t>
+                      </a:r>
+                    </a:p>
+                  </a:txBody>
+                  <a:tcPr/>
+                </a:tc>
+                <a:tc>
+                  <a:txBody>
+                    <a:bodyPr/>
+                    <a:lstStyle/>
+                    <a:p>
+                      <a:pPr>
+                        <a:defRPr sz="1000"/>
+                      </a:pPr>
+                      <a:r>
+                        <a:t>호치민/하노이 수산물 수입상</a:t>
+                      </a:r>
+                    </a:p>
+                  </a:txBody>
+                  <a:tcPr/>
+                </a:tc>
+                <a:tc>
+                  <a:txBody>
+                    <a:bodyPr/>
+                    <a:lstStyle/>
+                    <a:p>
+                      <a:pPr>
+                        <a:defRPr sz="1000"/>
+                      </a:pPr>
+                      <a:r>
+                        <a:t>한국 식당가 및 고급 수산 레스토랑</a:t>
+                      </a:r>
+                    </a:p>
+                  </a:txBody>
+                  <a:tcPr/>
+                </a:tc>
+              </a:tr>
+              <a:tr h="473825">
+                <a:tc>
+                  <a:txBody>
+                    <a:bodyPr/>
+                    <a:lstStyle/>
+                    <a:p>
+                      <a:pPr>
+                        <a:defRPr sz="1000"/>
+                      </a:pPr>
+                      <a:r>
+                        <a:t>8위</a:t>
+                      </a:r>
+                    </a:p>
+                  </a:txBody>
+                  <a:tcPr/>
+                </a:tc>
+                <a:tc>
+                  <a:txBody>
+                    <a:bodyPr/>
+                    <a:lstStyle/>
+                    <a:p>
+                      <a:pPr>
+                        <a:defRPr sz="1000"/>
+                      </a:pPr>
+                      <a:r>
+                        <a:t>캐나다 (Canada)</a:t>
+                      </a:r>
+                    </a:p>
+                  </a:txBody>
+                  <a:tcPr/>
+                </a:tc>
+                <a:tc>
+                  <a:txBody>
+                    <a:bodyPr/>
+                    <a:lstStyle/>
+                    <a:p>
+                      <a:pPr>
+                        <a:defRPr sz="1000"/>
+                      </a:pPr>
+                      <a:r>
+                        <a:t>1.8%</a:t>
+                      </a:r>
+                    </a:p>
+                  </a:txBody>
+                  <a:tcPr/>
+                </a:tc>
+                <a:tc>
+                  <a:txBody>
+                    <a:bodyPr/>
+                    <a:lstStyle/>
+                    <a:p>
+                      <a:pPr>
+                        <a:defRPr sz="1000"/>
+                      </a:pPr>
+                      <a:r>
+                        <a:t>밴쿠버 아시안 수산 유통사</a:t>
+                      </a:r>
+                    </a:p>
+                  </a:txBody>
+                  <a:tcPr/>
+                </a:tc>
+                <a:tc>
+                  <a:txBody>
+                    <a:bodyPr/>
+                    <a:lstStyle/>
+                    <a:p>
+                      <a:pPr>
+                        <a:defRPr sz="1000"/>
+                      </a:pPr>
+                      <a:r>
+                        <a:t>밴쿠버/토론토 아시안 마트 공급</a:t>
+                      </a:r>
+                    </a:p>
+                  </a:txBody>
+                  <a:tcPr/>
+                </a:tc>
+              </a:tr>
+              <a:tr h="473825">
+                <a:tc>
+                  <a:txBody>
+                    <a:bodyPr/>
+                    <a:lstStyle/>
+                    <a:p>
+                      <a:pPr>
+                        <a:defRPr sz="1000"/>
+                      </a:pPr>
+                      <a:r>
+                        <a:t>9위</a:t>
+                      </a:r>
+                    </a:p>
+                  </a:txBody>
+                  <a:tcPr/>
+                </a:tc>
+                <a:tc>
+                  <a:txBody>
+                    <a:bodyPr/>
+                    <a:lstStyle/>
+                    <a:p>
+                      <a:pPr>
+                        <a:defRPr sz="1000"/>
+                      </a:pPr>
+                      <a:r>
+                        <a:t>태국 (Thailand)</a:t>
+                      </a:r>
+                    </a:p>
+                  </a:txBody>
+                  <a:tcPr/>
+                </a:tc>
+                <a:tc>
+                  <a:txBody>
+                    <a:bodyPr/>
+                    <a:lstStyle/>
+                    <a:p>
+                      <a:pPr>
+                        <a:defRPr sz="1000"/>
+                      </a:pPr>
+                      <a:r>
+                        <a:t>1.3%</a:t>
+                      </a:r>
+                    </a:p>
+                  </a:txBody>
+                  <a:tcPr/>
+                </a:tc>
+                <a:tc>
+                  <a:txBody>
+                    <a:bodyPr/>
+                    <a:lstStyle/>
+                    <a:p>
+                      <a:pPr>
+                        <a:defRPr sz="1000"/>
+                      </a:pPr>
+                      <a:r>
+                        <a:t>방콕 고급 수산물 수입 대리점</a:t>
+                      </a:r>
+                    </a:p>
+                  </a:txBody>
+                  <a:tcPr/>
+                </a:tc>
+                <a:tc>
+                  <a:txBody>
+                    <a:bodyPr/>
+                    <a:lstStyle/>
+                    <a:p>
+                      <a:pPr>
+                        <a:defRPr sz="1000"/>
+                      </a:pPr>
+                      <a:r>
+                        <a:t>방콕 5성급 호텔 수산물 오퍼</a:t>
+                      </a:r>
+                    </a:p>
+                  </a:txBody>
+                  <a:tcPr/>
+                </a:tc>
+              </a:tr>
+              <a:tr h="473830">
+                <a:tc>
+                  <a:txBody>
+                    <a:bodyPr/>
+                    <a:lstStyle/>
+                    <a:p>
+                      <a:pPr>
+                        <a:defRPr sz="1000"/>
+                      </a:pPr>
+                      <a:r>
+                        <a:t>10위</a:t>
+                      </a:r>
+                    </a:p>
+                  </a:txBody>
+                  <a:tcPr/>
+                </a:tc>
+                <a:tc>
+                  <a:txBody>
+                    <a:bodyPr/>
+                    <a:lstStyle/>
+                    <a:p>
+                      <a:pPr>
+                        <a:defRPr sz="1000"/>
+                      </a:pPr>
+                      <a:r>
+                        <a:t>호주 (Australia)</a:t>
+                      </a:r>
+                    </a:p>
+                  </a:txBody>
+                  <a:tcPr/>
+                </a:tc>
+                <a:tc>
+                  <a:txBody>
+                    <a:bodyPr/>
+                    <a:lstStyle/>
+                    <a:p>
+                      <a:pPr>
+                        <a:defRPr sz="1000"/>
+                      </a:pPr>
+                      <a:r>
+                        <a:t>1.2%</a:t>
+                      </a:r>
+                    </a:p>
+                  </a:txBody>
+                  <a:tcPr/>
+                </a:tc>
+                <a:tc>
+                  <a:txBody>
+                    <a:bodyPr/>
+                    <a:lstStyle/>
+                    <a:p>
+                      <a:pPr>
+                        <a:defRPr sz="1000"/>
+                      </a:pPr>
+                      <a:r>
+                        <a:t>시드니 아시안 식품 유통 벤더</a:t>
+                      </a:r>
+                    </a:p>
+                  </a:txBody>
+                  <a:tcPr/>
+                </a:tc>
+                <a:tc>
+                  <a:txBody>
+                    <a:bodyPr/>
+                    <a:lstStyle/>
+                    <a:p>
+                      <a:pPr>
+                        <a:defRPr sz="1000"/>
+                      </a:pPr>
+                      <a:r>
+                        <a:t>호주 한인 마트 및 아시안 레스토랑</a:t>
+                      </a:r>
+                    </a:p>
+                  </a:txBody>
+                  <a:tcPr/>
+                </a:tc>
+              </a:tr>
+            </a:tbl>
+          </a:graphicData>
+        </a:graphic>
+      </p:graphicFrame>
+    </p:spTree>
+  </p:cSld>
+  <p:clrMapOvr>
+    <a:masterClrMapping/>
+  </p:clrMapOvr>
+</p:sld>
+</file>
+
+<file path=ppt/slides/slide4.xml><?xml version="1.0" encoding="utf-8"?>
+<p:sld xmlns:a="http://schemas.openxmlformats.org/drawingml/2006/main" xmlns:p="http://schemas.openxmlformats.org/presentationml/2006/main" xmlns:r="http://schemas.openxmlformats.org/officeDocument/2006/relationships">
+  <p:cSld>
+    <p:spTree>
+      <p:nvGrpSpPr>
+        <p:cNvPr id="1" name=""/>
+        <p:cNvGrpSpPr/>
+        <p:nvPr/>
+      </p:nvGrpSpPr>
+      <p:grpSpPr/>
+      <p:sp>
+        <p:nvSpPr>
+          <p:cNvPr id="2" name="TextBox 1"/>
+          <p:cNvSpPr txBox="1"/>
+          <p:nvPr/>
+        </p:nvSpPr>
+        <p:spPr>
+          <a:xfrm>
+            <a:off x="731520" y="365760"/>
+            <a:ext cx="10698480" cy="731520"/>
+          </a:xfrm>
+          <a:prstGeom prst="rect">
+            <a:avLst/>
+          </a:prstGeom>
+          <a:noFill/>
+        </p:spPr>
+        <p:txBody>
+          <a:bodyPr wrap="none">
+            <a:spAutoFit/>
+          </a:bodyPr>
+          <a:lstStyle/>
+          <a:p>
+            <a:pPr>
+              <a:defRPr b="1" sz="2200">
+                <a:solidFill>
+                  <a:srgbClr val="1F497D"/>
+                </a:solidFill>
+              </a:defRPr>
+            </a:pPr>
+            <a:r>
+              <a:t>🗺️ [표 2] HS 0307.83 (냉동 전복) TOP 10 유망 국가</a:t>
+            </a:r>
+          </a:p>
+        </p:txBody>
+      </p:sp>
+      <p:graphicFrame>
+        <p:nvGraphicFramePr>
+          <p:cNvPr id="3" name="Table 2"/>
+          <p:cNvGraphicFramePr>
+            <a:graphicFrameLocks noGrp="1"/>
+          </p:cNvGraphicFramePr>
+          <p:nvPr/>
+        </p:nvGraphicFramePr>
+        <p:xfrm>
+          <a:off x="731520" y="1188720"/>
+          <a:ext cx="10698480" cy="5212080"/>
+        </p:xfrm>
+        <a:graphic>
+          <a:graphicData uri="http://schemas.openxmlformats.org/drawingml/2006/table">
+            <a:tbl>
+              <a:tblPr firstRow="1" bandRow="1">
+                <a:tableStyleId>{5C22544A-7EE6-4342-B048-85BDC9FD1C3A}</a:tableStyleId>
+              </a:tblPr>
+              <a:tblGrid>
+                <a:gridCol w="2139696"/>
+                <a:gridCol w="2139696"/>
+                <a:gridCol w="2139696"/>
+                <a:gridCol w="2139696"/>
+                <a:gridCol w="2139696"/>
+              </a:tblGrid>
+              <a:tr h="473825">
+                <a:tc>
+                  <a:txBody>
+                    <a:bodyPr/>
+                    <a:lstStyle/>
+                    <a:p>
+                      <a:pPr>
+                        <a:defRPr sz="1000" b="1">
+                          <a:solidFill>
+                            <a:srgbClr val="FFFFFF"/>
+                          </a:solidFill>
+                        </a:defRPr>
+                      </a:pPr>
+                      <a:r>
+                        <a:t>유망순위</a:t>
+                      </a:r>
+                    </a:p>
+                  </a:txBody>
+                  <a:tcPr>
+                    <a:solidFill>
+                      <a:srgbClr val="1F497D"/>
+                    </a:solidFill>
+                  </a:tcPr>
+                </a:tc>
+                <a:tc>
+                  <a:txBody>
+                    <a:bodyPr/>
+                    <a:lstStyle/>
+                    <a:p>
+                      <a:pPr>
+                        <a:defRPr sz="1000" b="1">
+                          <a:solidFill>
+                            <a:srgbClr val="FFFFFF"/>
+                          </a:solidFill>
+                        </a:defRPr>
+                      </a:pPr>
+                      <a:r>
+                        <a:t>타깃 국가</a:t>
+                      </a:r>
+                    </a:p>
+                  </a:txBody>
+                  <a:tcPr>
+                    <a:solidFill>
+                      <a:srgbClr val="1F497D"/>
+                    </a:solidFill>
+                  </a:tcPr>
+                </a:tc>
+                <a:tc>
+                  <a:txBody>
+                    <a:bodyPr/>
+                    <a:lstStyle/>
+                    <a:p>
+                      <a:pPr>
+                        <a:defRPr sz="1000" b="1">
+                          <a:solidFill>
+                            <a:srgbClr val="FFFFFF"/>
+                          </a:solidFill>
+                        </a:defRPr>
+                      </a:pPr>
+                      <a:r>
+                        <a:t>무역액 점유율</a:t>
+                      </a:r>
+                    </a:p>
+                  </a:txBody>
+                  <a:tcPr>
+                    <a:solidFill>
+                      <a:srgbClr val="1F497D"/>
+                    </a:solidFill>
+                  </a:tcPr>
+                </a:tc>
+                <a:tc>
+                  <a:txBody>
+                    <a:bodyPr/>
+                    <a:lstStyle/>
+                    <a:p>
+                      <a:pPr>
+                        <a:defRPr sz="1000" b="1">
+                          <a:solidFill>
+                            <a:srgbClr val="FFFFFF"/>
+                          </a:solidFill>
+                        </a:defRPr>
+                      </a:pPr>
+                      <a:r>
+                        <a:t>컨택 파트너 종류</a:t>
+                      </a:r>
+                    </a:p>
+                  </a:txBody>
+                  <a:tcPr>
+                    <a:solidFill>
+                      <a:srgbClr val="1F497D"/>
+                    </a:solidFill>
+                  </a:tcPr>
+                </a:tc>
+                <a:tc>
+                  <a:txBody>
+                    <a:bodyPr/>
+                    <a:lstStyle/>
+                    <a:p>
+                      <a:pPr>
+                        <a:defRPr sz="1000" b="1">
+                          <a:solidFill>
+                            <a:srgbClr val="FFFFFF"/>
+                          </a:solidFill>
+                        </a:defRPr>
+                      </a:pPr>
+                      <a:r>
+                        <a:t>시장개척 포인트</a:t>
+                      </a:r>
+                    </a:p>
+                  </a:txBody>
+                  <a:tcPr>
+                    <a:solidFill>
+                      <a:srgbClr val="1F497D"/>
+                    </a:solidFill>
+                  </a:tcPr>
+                </a:tc>
+              </a:tr>
+              <a:tr h="473825">
+                <a:tc>
+                  <a:txBody>
+                    <a:bodyPr/>
+                    <a:lstStyle/>
+                    <a:p>
+                      <a:pPr>
+                        <a:defRPr sz="1000"/>
+                      </a:pPr>
+                      <a:r>
+                        <a:t>1위</a:t>
+                      </a:r>
+                    </a:p>
+                  </a:txBody>
+                  <a:tcPr/>
+                </a:tc>
+                <a:tc>
+                  <a:txBody>
+                    <a:bodyPr/>
+                    <a:lstStyle/>
+                    <a:p>
+                      <a:pPr>
+                        <a:defRPr sz="1000"/>
+                      </a:pPr>
+                      <a:r>
+                        <a:t>미국 (USA)</a:t>
+                      </a:r>
+                    </a:p>
+                  </a:txBody>
+                  <a:tcPr/>
+                </a:tc>
+                <a:tc>
+                  <a:txBody>
+                    <a:bodyPr/>
+                    <a:lstStyle/>
+                    <a:p>
+                      <a:pPr>
+                        <a:defRPr sz="1000"/>
+                      </a:pPr>
+                      <a:r>
+                        <a:t>42.1%</a:t>
+                      </a:r>
+                    </a:p>
+                  </a:txBody>
+                  <a:tcPr/>
+                </a:tc>
+                <a:tc>
+                  <a:txBody>
+                    <a:bodyPr/>
+                    <a:lstStyle/>
+                    <a:p>
+                      <a:pPr>
+                        <a:defRPr sz="1000"/>
+                      </a:pPr>
+                      <a:r>
+                        <a:t>미 서부 최대 수산물 수입 벤더 (PASCO)</a:t>
+                      </a:r>
+                    </a:p>
+                  </a:txBody>
+                  <a:tcPr/>
+                </a:tc>
+                <a:tc>
+                  <a:txBody>
+                    <a:bodyPr/>
+                    <a:lstStyle/>
+                    <a:p>
+                      <a:pPr>
+                        <a:defRPr sz="1000"/>
+                      </a:pPr>
+                      <a:r>
+                        <a:t>아시안 마트향 냉동 IQF 공급</a:t>
+                      </a:r>
+                    </a:p>
+                  </a:txBody>
+                  <a:tcPr/>
+                </a:tc>
+              </a:tr>
+              <a:tr h="473825">
+                <a:tc>
+                  <a:txBody>
+                    <a:bodyPr/>
+                    <a:lstStyle/>
+                    <a:p>
+                      <a:pPr>
+                        <a:defRPr sz="1000"/>
+                      </a:pPr>
+                      <a:r>
+                        <a:t>2위</a:t>
+                      </a:r>
+                    </a:p>
+                  </a:txBody>
+                  <a:tcPr/>
+                </a:tc>
+                <a:tc>
+                  <a:txBody>
+                    <a:bodyPr/>
+                    <a:lstStyle/>
+                    <a:p>
+                      <a:pPr>
+                        <a:defRPr sz="1000"/>
+                      </a:pPr>
+                      <a:r>
+                        <a:t>대만 (Taiwan)</a:t>
+                      </a:r>
+                    </a:p>
+                  </a:txBody>
+                  <a:tcPr/>
+                </a:tc>
+                <a:tc>
+                  <a:txBody>
+                    <a:bodyPr/>
+                    <a:lstStyle/>
+                    <a:p>
+                      <a:pPr>
+                        <a:defRPr sz="1000"/>
+                      </a:pPr>
+                      <a:r>
+                        <a:t>19.8%</a:t>
+                      </a:r>
+                    </a:p>
+                  </a:txBody>
+                  <a:tcPr/>
+                </a:tc>
+                <a:tc>
+                  <a:txBody>
+                    <a:bodyPr/>
+                    <a:lstStyle/>
+                    <a:p>
+                      <a:pPr>
+                        <a:defRPr sz="1000"/>
+                      </a:pPr>
+                      <a:r>
+                        <a:t>타이베이 식자재 수입 디스트리뷰터</a:t>
+                      </a:r>
+                    </a:p>
+                  </a:txBody>
+                  <a:tcPr/>
+                </a:tc>
+                <a:tc>
+                  <a:txBody>
+                    <a:bodyPr/>
+                    <a:lstStyle/>
+                    <a:p>
+                      <a:pPr>
+                        <a:defRPr sz="1000"/>
+                      </a:pPr>
+                      <a:r>
+                        <a:t>뷔페/연회장향 IQF 냉동 대량 공급</a:t>
+                      </a:r>
+                    </a:p>
+                  </a:txBody>
+                  <a:tcPr/>
+                </a:tc>
+              </a:tr>
+              <a:tr h="473825">
+                <a:tc>
+                  <a:txBody>
+                    <a:bodyPr/>
+                    <a:lstStyle/>
+                    <a:p>
+                      <a:pPr>
+                        <a:defRPr sz="1000"/>
+                      </a:pPr>
+                      <a:r>
+                        <a:t>3위</a:t>
+                      </a:r>
+                    </a:p>
+                  </a:txBody>
+                  <a:tcPr/>
+                </a:tc>
+                <a:tc>
+                  <a:txBody>
+                    <a:bodyPr/>
+                    <a:lstStyle/>
+                    <a:p>
+                      <a:pPr>
+                        <a:defRPr sz="1000"/>
+                      </a:pPr>
+                      <a:r>
+                        <a:t>일본 (Japan)</a:t>
+                      </a:r>
+                    </a:p>
+                  </a:txBody>
+                  <a:tcPr/>
+                </a:tc>
+                <a:tc>
+                  <a:txBody>
+                    <a:bodyPr/>
+                    <a:lstStyle/>
+                    <a:p>
+                      <a:pPr>
+                        <a:defRPr sz="1000"/>
+                      </a:pPr>
+                      <a:r>
+                        <a:t>15.3%</a:t>
+                      </a:r>
+                    </a:p>
+                  </a:txBody>
+                  <a:tcPr/>
+                </a:tc>
+                <a:tc>
+                  <a:txBody>
+                    <a:bodyPr/>
+                    <a:lstStyle/>
+                    <a:p>
+                      <a:pPr>
+                        <a:defRPr sz="1000"/>
+                      </a:pPr>
+                      <a:r>
+                        <a:t>관서 지역 냉동 수산물 수입 대리점</a:t>
+                      </a:r>
+                    </a:p>
+                  </a:txBody>
+                  <a:tcPr/>
+                </a:tc>
+                <a:tc>
+                  <a:txBody>
+                    <a:bodyPr/>
+                    <a:lstStyle/>
+                    <a:p>
+                      <a:pPr>
+                        <a:defRPr sz="1000"/>
+                      </a:pPr>
+                      <a:r>
+                        <a:t>성수기 외식 체인 원료 공급</a:t>
+                      </a:r>
+                    </a:p>
+                  </a:txBody>
+                  <a:tcPr/>
+                </a:tc>
+              </a:tr>
+              <a:tr h="473825">
+                <a:tc>
+                  <a:txBody>
+                    <a:bodyPr/>
+                    <a:lstStyle/>
+                    <a:p>
+                      <a:pPr>
+                        <a:defRPr sz="1000"/>
+                      </a:pPr>
+                      <a:r>
+                        <a:t>4위</a:t>
+                      </a:r>
+                    </a:p>
+                  </a:txBody>
+                  <a:tcPr/>
+                </a:tc>
+                <a:tc>
+                  <a:txBody>
+                    <a:bodyPr/>
+                    <a:lstStyle/>
+                    <a:p>
+                      <a:pPr>
+                        <a:defRPr sz="1000"/>
+                      </a:pPr>
+                      <a:r>
+                        <a:t>홍콩 (Hong Kong)</a:t>
+                      </a:r>
+                    </a:p>
+                  </a:txBody>
+                  <a:tcPr/>
+                </a:tc>
+                <a:tc>
+                  <a:txBody>
+                    <a:bodyPr/>
+                    <a:lstStyle/>
+                    <a:p>
+                      <a:pPr>
+                        <a:defRPr sz="1000"/>
+                      </a:pPr>
+                      <a:r>
+                        <a:t>8.2%</a:t>
+                      </a:r>
+                    </a:p>
+                  </a:txBody>
+                  <a:tcPr/>
+                </a:tc>
+                <a:tc>
+                  <a:txBody>
+                    <a:bodyPr/>
+                    <a:lstStyle/>
+                    <a:p>
+                      <a:pPr>
+                        <a:defRPr sz="1000"/>
+                      </a:pPr>
+                      <a:r>
+                        <a:t>냉동 수산물 전문 수입 유통사</a:t>
+                      </a:r>
+                    </a:p>
+                  </a:txBody>
+                  <a:tcPr/>
+                </a:tc>
+                <a:tc>
+                  <a:txBody>
+                    <a:bodyPr/>
+                    <a:lstStyle/>
+                    <a:p>
+                      <a:pPr>
+                        <a:defRPr sz="1000"/>
+                      </a:pPr>
+                      <a:r>
+                        <a:t>외식 체인 및 호텔 냉동 IQF 공급</a:t>
+                      </a:r>
+                    </a:p>
+                  </a:txBody>
+                  <a:tcPr/>
+                </a:tc>
+              </a:tr>
+              <a:tr h="473825">
+                <a:tc>
+                  <a:txBody>
+                    <a:bodyPr/>
+                    <a:lstStyle/>
+                    <a:p>
+                      <a:pPr>
+                        <a:defRPr sz="1000"/>
+                      </a:pPr>
+                      <a:r>
+                        <a:t>5위</a:t>
+                      </a:r>
+                    </a:p>
+                  </a:txBody>
+                  <a:tcPr/>
+                </a:tc>
+                <a:tc>
+                  <a:txBody>
+                    <a:bodyPr/>
+                    <a:lstStyle/>
+                    <a:p>
+                      <a:pPr>
+                        <a:defRPr sz="1000"/>
+                      </a:pPr>
+                      <a:r>
+                        <a:t>싱가포르 (Singapore)</a:t>
+                      </a:r>
+                    </a:p>
+                  </a:txBody>
+                  <a:tcPr/>
+                </a:tc>
+                <a:tc>
+                  <a:txBody>
+                    <a:bodyPr/>
+                    <a:lstStyle/>
+                    <a:p>
+                      <a:pPr>
+                        <a:defRPr sz="1000"/>
+                      </a:pPr>
+                      <a:r>
+                        <a:t>4.5%</a:t>
+                      </a:r>
+                    </a:p>
+                  </a:txBody>
+                  <a:tcPr/>
+                </a:tc>
+                <a:tc>
+                  <a:txBody>
+                    <a:bodyPr/>
+                    <a:lstStyle/>
+                    <a:p>
+                      <a:pPr>
+                        <a:defRPr sz="1000"/>
+                      </a:pPr>
+                      <a:r>
+                        <a:t>동남아 아시안 식자재 유통 벤더</a:t>
+                      </a:r>
+                    </a:p>
+                  </a:txBody>
+                  <a:tcPr/>
+                </a:tc>
+                <a:tc>
+                  <a:txBody>
+                    <a:bodyPr/>
+                    <a:lstStyle/>
+                    <a:p>
+                      <a:pPr>
+                        <a:defRPr sz="1000"/>
+                      </a:pPr>
+                      <a:r>
+                        <a:t>뷔페 및 딤섬 프랜차이즈 공급</a:t>
+                      </a:r>
+                    </a:p>
+                  </a:txBody>
+                  <a:tcPr/>
+                </a:tc>
+              </a:tr>
+              <a:tr h="473825">
+                <a:tc>
+                  <a:txBody>
+                    <a:bodyPr/>
+                    <a:lstStyle/>
+                    <a:p>
+                      <a:pPr>
+                        <a:defRPr sz="1000"/>
+                      </a:pPr>
+                      <a:r>
+                        <a:t>6위</a:t>
+                      </a:r>
+                    </a:p>
+                  </a:txBody>
+                  <a:tcPr/>
+                </a:tc>
+                <a:tc>
+                  <a:txBody>
+                    <a:bodyPr/>
+                    <a:lstStyle/>
+                    <a:p>
+                      <a:pPr>
+                        <a:defRPr sz="1000"/>
+                      </a:pPr>
+                      <a:r>
+                        <a:t>중국 (China)</a:t>
+                      </a:r>
+                    </a:p>
+                  </a:txBody>
+                  <a:tcPr/>
+                </a:tc>
+                <a:tc>
+                  <a:txBody>
+                    <a:bodyPr/>
+                    <a:lstStyle/>
+                    <a:p>
+                      <a:pPr>
+                        <a:defRPr sz="1000"/>
+                      </a:pPr>
+                      <a:r>
+                        <a:t>3.8%</a:t>
+                      </a:r>
+                    </a:p>
+                  </a:txBody>
+                  <a:tcPr/>
+                </a:tc>
+                <a:tc>
+                  <a:txBody>
+                    <a:bodyPr/>
+                    <a:lstStyle/>
+                    <a:p>
+                      <a:pPr>
+                        <a:defRPr sz="1000"/>
+                      </a:pPr>
+                      <a:r>
+                        <a:t>연안 도시 식품 가공 및 유통사</a:t>
+                      </a:r>
+                    </a:p>
+                  </a:txBody>
+                  <a:tcPr/>
+                </a:tc>
+                <a:tc>
+                  <a:txBody>
+                    <a:bodyPr/>
+                    <a:lstStyle/>
+                    <a:p>
+                      <a:pPr>
+                        <a:defRPr sz="1000"/>
+                      </a:pPr>
+                      <a:r>
+                        <a:t>가공 원료용 냉동 IQF 전복 공급</a:t>
+                      </a:r>
+                    </a:p>
+                  </a:txBody>
+                  <a:tcPr/>
+                </a:tc>
+              </a:tr>
+              <a:tr h="473825">
+                <a:tc>
+                  <a:txBody>
+                    <a:bodyPr/>
+                    <a:lstStyle/>
+                    <a:p>
+                      <a:pPr>
+                        <a:defRPr sz="1000"/>
+                      </a:pPr>
+                      <a:r>
+                        <a:t>7위</a:t>
+                      </a:r>
+                    </a:p>
+                  </a:txBody>
+                  <a:tcPr/>
+                </a:tc>
+                <a:tc>
+                  <a:txBody>
+                    <a:bodyPr/>
+                    <a:lstStyle/>
+                    <a:p>
+                      <a:pPr>
+                        <a:defRPr sz="1000"/>
+                      </a:pPr>
+                      <a:r>
+                        <a:t>캐나다 (Canada)</a:t>
+                      </a:r>
+                    </a:p>
+                  </a:txBody>
+                  <a:tcPr/>
+                </a:tc>
+                <a:tc>
+                  <a:txBody>
+                    <a:bodyPr/>
+                    <a:lstStyle/>
+                    <a:p>
+                      <a:pPr>
+                        <a:defRPr sz="1000"/>
+                      </a:pPr>
+                      <a:r>
+                        <a:t>2.1%</a:t>
+                      </a:r>
+                    </a:p>
+                  </a:txBody>
+                  <a:tcPr/>
+                </a:tc>
+                <a:tc>
+                  <a:txBody>
+                    <a:bodyPr/>
+                    <a:lstStyle/>
+                    <a:p>
+                      <a:pPr>
+                        <a:defRPr sz="1000"/>
+                      </a:pPr>
+                      <a:r>
+                        <a:t>토론토 수산물 수입 벤더</a:t>
+                      </a:r>
+                    </a:p>
+                  </a:txBody>
+                  <a:tcPr/>
+                </a:tc>
+                <a:tc>
+                  <a:txBody>
+                    <a:bodyPr/>
+                    <a:lstStyle/>
+                    <a:p>
+                      <a:pPr>
+                        <a:defRPr sz="1000"/>
+                      </a:pPr>
+                      <a:r>
+                        <a:t>아시안 마트 냉동 해산물 공급</a:t>
+                      </a:r>
+                    </a:p>
+                  </a:txBody>
+                  <a:tcPr/>
+                </a:tc>
+              </a:tr>
+              <a:tr h="473825">
+                <a:tc>
+                  <a:txBody>
+                    <a:bodyPr/>
+                    <a:lstStyle/>
+                    <a:p>
+                      <a:pPr>
+                        <a:defRPr sz="1000"/>
+                      </a:pPr>
+                      <a:r>
+                        <a:t>8위</a:t>
+                      </a:r>
+                    </a:p>
+                  </a:txBody>
+                  <a:tcPr/>
+                </a:tc>
+                <a:tc>
+                  <a:txBody>
+                    <a:bodyPr/>
+                    <a:lstStyle/>
+                    <a:p>
+                      <a:pPr>
+                        <a:defRPr sz="1000"/>
+                      </a:pPr>
+                      <a:r>
+                        <a:t>베트남 (Vietnam)</a:t>
+                      </a:r>
+                    </a:p>
+                  </a:txBody>
+                  <a:tcPr/>
+                </a:tc>
+                <a:tc>
+                  <a:txBody>
+                    <a:bodyPr/>
+                    <a:lstStyle/>
+                    <a:p>
+                      <a:pPr>
+                        <a:defRPr sz="1000"/>
+                      </a:pPr>
+                      <a:r>
+                        <a:t>1.8%</a:t>
+                      </a:r>
+                    </a:p>
+                  </a:txBody>
+                  <a:tcPr/>
+                </a:tc>
+                <a:tc>
+                  <a:txBody>
+                    <a:bodyPr/>
+                    <a:lstStyle/>
+                    <a:p>
+                      <a:pPr>
+                        <a:defRPr sz="1000"/>
+                      </a:pPr>
+                      <a:r>
+                        <a:t>외식 식자재 1차 수입상</a:t>
+                      </a:r>
+                    </a:p>
+                  </a:txBody>
+                  <a:tcPr/>
+                </a:tc>
+                <a:tc>
+                  <a:txBody>
+                    <a:bodyPr/>
+                    <a:lstStyle/>
+                    <a:p>
+                      <a:pPr>
+                        <a:defRPr sz="1000"/>
+                      </a:pPr>
+                      <a:r>
+                        <a:t>프랜차이즈 레스토랑 IQF 공급</a:t>
+                      </a:r>
+                    </a:p>
+                  </a:txBody>
+                  <a:tcPr/>
+                </a:tc>
+              </a:tr>
+              <a:tr h="473825">
+                <a:tc>
+                  <a:txBody>
+                    <a:bodyPr/>
+                    <a:lstStyle/>
+                    <a:p>
+                      <a:pPr>
+                        <a:defRPr sz="1000"/>
+                      </a:pPr>
+                      <a:r>
+                        <a:t>9위</a:t>
+                      </a:r>
+                    </a:p>
+                  </a:txBody>
+                  <a:tcPr/>
+                </a:tc>
+                <a:tc>
+                  <a:txBody>
+                    <a:bodyPr/>
+                    <a:lstStyle/>
+                    <a:p>
+                      <a:pPr>
+                        <a:defRPr sz="1000"/>
+                      </a:pPr>
+                      <a:r>
+                        <a:t>태국 (Thailand)</a:t>
+                      </a:r>
+                    </a:p>
+                  </a:txBody>
+                  <a:tcPr/>
+                </a:tc>
+                <a:tc>
+                  <a:txBody>
+                    <a:bodyPr/>
+                    <a:lstStyle/>
+                    <a:p>
+                      <a:pPr>
+                        <a:defRPr sz="1000"/>
+                      </a:pPr>
+                      <a:r>
+                        <a:t>1.3%</a:t>
+                      </a:r>
+                    </a:p>
+                  </a:txBody>
+                  <a:tcPr/>
+                </a:tc>
+                <a:tc>
+                  <a:txBody>
+                    <a:bodyPr/>
+                    <a:lstStyle/>
+                    <a:p>
+                      <a:pPr>
+                        <a:defRPr sz="1000"/>
+                      </a:pPr>
+                      <a:r>
+                        <a:t>방콕 식자재 수입 대리점</a:t>
+                      </a:r>
+                    </a:p>
+                  </a:txBody>
+                  <a:tcPr/>
+                </a:tc>
+                <a:tc>
+                  <a:txBody>
+                    <a:bodyPr/>
+                    <a:lstStyle/>
+                    <a:p>
+                      <a:pPr>
+                        <a:defRPr sz="1000"/>
+                      </a:pPr>
+                      <a:r>
+                        <a:t>외식 뷔페 및 씨푸드 레스토랑 공급</a:t>
+                      </a:r>
+                    </a:p>
+                  </a:txBody>
+                  <a:tcPr/>
+                </a:tc>
+              </a:tr>
+              <a:tr h="473830">
+                <a:tc>
+                  <a:txBody>
+                    <a:bodyPr/>
+                    <a:lstStyle/>
+                    <a:p>
+                      <a:pPr>
+                        <a:defRPr sz="1000"/>
+                      </a:pPr>
+                      <a:r>
+                        <a:t>10위</a:t>
+                      </a:r>
+                    </a:p>
+                  </a:txBody>
+                  <a:tcPr/>
+                </a:tc>
+                <a:tc>
+                  <a:txBody>
+                    <a:bodyPr/>
+                    <a:lstStyle/>
+                    <a:p>
+                      <a:pPr>
+                        <a:defRPr sz="1000"/>
+                      </a:pPr>
+                      <a:r>
+                        <a:t>영국 (United Kingdom)</a:t>
+                      </a:r>
+                    </a:p>
+                  </a:txBody>
+                  <a:tcPr/>
+                </a:tc>
+                <a:tc>
+                  <a:txBody>
+                    <a:bodyPr/>
+                    <a:lstStyle/>
+                    <a:p>
+                      <a:pPr>
+                        <a:defRPr sz="1000"/>
+                      </a:pPr>
+                      <a:r>
+                        <a:t>1.1%</a:t>
+                      </a:r>
+                    </a:p>
+                  </a:txBody>
+                  <a:tcPr/>
+                </a:tc>
+                <a:tc>
+                  <a:txBody>
+                    <a:bodyPr/>
+                    <a:lstStyle/>
+                    <a:p>
+                      <a:pPr>
+                        <a:defRPr sz="1000"/>
+                      </a:pPr>
+                      <a:r>
+                        <a:t>런던 아시안 식품 수입 벤더</a:t>
+                      </a:r>
+                    </a:p>
+                  </a:txBody>
+                  <a:tcPr/>
+                </a:tc>
+                <a:tc>
+                  <a:txBody>
+                    <a:bodyPr/>
+                    <a:lstStyle/>
+                    <a:p>
+                      <a:pPr>
+                        <a:defRPr sz="1000"/>
+                      </a:pPr>
+                      <a:r>
+                        <a:t>런던 아시안 마트 및 한식당 공급</a:t>
+                      </a:r>
+                    </a:p>
+                  </a:txBody>
+                  <a:tcPr/>
+                </a:tc>
+              </a:tr>
+            </a:tbl>
+          </a:graphicData>
+        </a:graphic>
+      </p:graphicFrame>
+    </p:spTree>
+  </p:cSld>
+  <p:clrMapOvr>
+    <a:masterClrMapping/>
+  </p:clrMapOvr>
+</p:sld>
+</file>
+
+<file path=ppt/slides/slide5.xml><?xml version="1.0" encoding="utf-8"?>
+<p:sld xmlns:a="http://schemas.openxmlformats.org/drawingml/2006/main" xmlns:p="http://schemas.openxmlformats.org/presentationml/2006/main" xmlns:r="http://schemas.openxmlformats.org/officeDocument/2006/relationships">
+  <p:cSld>
+    <p:spTree>
+      <p:nvGrpSpPr>
+        <p:cNvPr id="1" name=""/>
+        <p:cNvGrpSpPr/>
+        <p:nvPr/>
+      </p:nvGrpSpPr>
+      <p:grpSpPr/>
+      <p:sp>
+        <p:nvSpPr>
+          <p:cNvPr id="2" name="TextBox 1"/>
+          <p:cNvSpPr txBox="1"/>
+          <p:nvPr/>
+        </p:nvSpPr>
+        <p:spPr>
+          <a:xfrm>
+            <a:off x="731520" y="365760"/>
+            <a:ext cx="10698480" cy="731520"/>
+          </a:xfrm>
+          <a:prstGeom prst="rect">
+            <a:avLst/>
+          </a:prstGeom>
+          <a:noFill/>
+        </p:spPr>
+        <p:txBody>
+          <a:bodyPr wrap="none">
+            <a:spAutoFit/>
+          </a:bodyPr>
+          <a:lstStyle/>
+          <a:p>
+            <a:pPr>
+              <a:defRPr b="1" sz="2200">
+                <a:solidFill>
+                  <a:srgbClr val="1F497D"/>
+                </a:solidFill>
+              </a:defRPr>
+            </a:pPr>
+            <a:r>
+              <a:t>🗺️ [표 3] HS 1605.57 (전복 통조림) TOP 10 유망 국가</a:t>
+            </a:r>
+          </a:p>
+        </p:txBody>
+      </p:sp>
+      <p:graphicFrame>
+        <p:nvGraphicFramePr>
+          <p:cNvPr id="3" name="Table 2"/>
+          <p:cNvGraphicFramePr>
+            <a:graphicFrameLocks noGrp="1"/>
+          </p:cNvGraphicFramePr>
+          <p:nvPr/>
+        </p:nvGraphicFramePr>
+        <p:xfrm>
+          <a:off x="731520" y="1188720"/>
+          <a:ext cx="10698480" cy="5212080"/>
+        </p:xfrm>
+        <a:graphic>
+          <a:graphicData uri="http://schemas.openxmlformats.org/drawingml/2006/table">
+            <a:tbl>
+              <a:tblPr firstRow="1" bandRow="1">
+                <a:tableStyleId>{5C22544A-7EE6-4342-B048-85BDC9FD1C3A}</a:tableStyleId>
+              </a:tblPr>
+              <a:tblGrid>
+                <a:gridCol w="2139696"/>
+                <a:gridCol w="2139696"/>
+                <a:gridCol w="2139696"/>
+                <a:gridCol w="2139696"/>
+                <a:gridCol w="2139696"/>
+              </a:tblGrid>
+              <a:tr h="473825">
+                <a:tc>
+                  <a:txBody>
+                    <a:bodyPr/>
+                    <a:lstStyle/>
+                    <a:p>
+                      <a:pPr>
+                        <a:defRPr sz="1000" b="1">
+                          <a:solidFill>
+                            <a:srgbClr val="FFFFFF"/>
+                          </a:solidFill>
+                        </a:defRPr>
+                      </a:pPr>
+                      <a:r>
+                        <a:t>유망순위</a:t>
+                      </a:r>
+                    </a:p>
+                  </a:txBody>
+                  <a:tcPr>
+                    <a:solidFill>
+                      <a:srgbClr val="1F497D"/>
+                    </a:solidFill>
+                  </a:tcPr>
+                </a:tc>
+                <a:tc>
+                  <a:txBody>
+                    <a:bodyPr/>
+                    <a:lstStyle/>
+                    <a:p>
+                      <a:pPr>
+                        <a:defRPr sz="1000" b="1">
+                          <a:solidFill>
+                            <a:srgbClr val="FFFFFF"/>
+                          </a:solidFill>
+                        </a:defRPr>
+                      </a:pPr>
+                      <a:r>
+                        <a:t>타깃 국가</a:t>
+                      </a:r>
+                    </a:p>
+                  </a:txBody>
+                  <a:tcPr>
+                    <a:solidFill>
+                      <a:srgbClr val="1F497D"/>
+                    </a:solidFill>
+                  </a:tcPr>
+                </a:tc>
+                <a:tc>
+                  <a:txBody>
+                    <a:bodyPr/>
+                    <a:lstStyle/>
+                    <a:p>
+                      <a:pPr>
+                        <a:defRPr sz="1000" b="1">
+                          <a:solidFill>
+                            <a:srgbClr val="FFFFFF"/>
+                          </a:solidFill>
+                        </a:defRPr>
+                      </a:pPr>
+                      <a:r>
+                        <a:t>무역액 점유율</a:t>
+                      </a:r>
+                    </a:p>
+                  </a:txBody>
+                  <a:tcPr>
+                    <a:solidFill>
+                      <a:srgbClr val="1F497D"/>
+                    </a:solidFill>
+                  </a:tcPr>
+                </a:tc>
+                <a:tc>
+                  <a:txBody>
+                    <a:bodyPr/>
+                    <a:lstStyle/>
+                    <a:p>
+                      <a:pPr>
+                        <a:defRPr sz="1000" b="1">
+                          <a:solidFill>
+                            <a:srgbClr val="FFFFFF"/>
+                          </a:solidFill>
+                        </a:defRPr>
+                      </a:pPr>
+                      <a:r>
+                        <a:t>컨택 파트너 종류</a:t>
+                      </a:r>
+                    </a:p>
+                  </a:txBody>
+                  <a:tcPr>
+                    <a:solidFill>
+                      <a:srgbClr val="1F497D"/>
+                    </a:solidFill>
+                  </a:tcPr>
+                </a:tc>
+                <a:tc>
+                  <a:txBody>
+                    <a:bodyPr/>
+                    <a:lstStyle/>
+                    <a:p>
+                      <a:pPr>
+                        <a:defRPr sz="1000" b="1">
+                          <a:solidFill>
+                            <a:srgbClr val="FFFFFF"/>
+                          </a:solidFill>
+                        </a:defRPr>
+                      </a:pPr>
+                      <a:r>
+                        <a:t>시장개척 포인트</a:t>
+                      </a:r>
+                    </a:p>
+                  </a:txBody>
+                  <a:tcPr>
+                    <a:solidFill>
+                      <a:srgbClr val="1F497D"/>
+                    </a:solidFill>
+                  </a:tcPr>
+                </a:tc>
+              </a:tr>
+              <a:tr h="473825">
+                <a:tc>
+                  <a:txBody>
+                    <a:bodyPr/>
+                    <a:lstStyle/>
+                    <a:p>
+                      <a:pPr>
+                        <a:defRPr sz="1000"/>
+                      </a:pPr>
+                      <a:r>
+                        <a:t>1위</a:t>
+                      </a:r>
+                    </a:p>
+                  </a:txBody>
+                  <a:tcPr/>
+                </a:tc>
+                <a:tc>
+                  <a:txBody>
+                    <a:bodyPr/>
+                    <a:lstStyle/>
+                    <a:p>
+                      <a:pPr>
+                        <a:defRPr sz="1000"/>
+                      </a:pPr>
+                      <a:r>
+                        <a:t>홍콩 (Hong Kong)</a:t>
+                      </a:r>
+                    </a:p>
+                  </a:txBody>
+                  <a:tcPr/>
+                </a:tc>
+                <a:tc>
+                  <a:txBody>
+                    <a:bodyPr/>
+                    <a:lstStyle/>
+                    <a:p>
+                      <a:pPr>
+                        <a:defRPr sz="1000"/>
+                      </a:pPr>
+                      <a:r>
+                        <a:t>48.5%</a:t>
+                      </a:r>
+                    </a:p>
+                  </a:txBody>
+                  <a:tcPr/>
+                </a:tc>
+                <a:tc>
+                  <a:txBody>
+                    <a:bodyPr/>
+                    <a:lstStyle/>
+                    <a:p>
+                      <a:pPr>
+                        <a:defRPr sz="1000"/>
+                      </a:pPr>
+                      <a:r>
+                        <a:t>홍콩 셩완 수산물 건재 수입상사</a:t>
+                      </a:r>
+                    </a:p>
+                  </a:txBody>
+                  <a:tcPr/>
+                </a:tc>
+                <a:tc>
+                  <a:txBody>
+                    <a:bodyPr/>
+                    <a:lstStyle/>
+                    <a:p>
+                      <a:pPr>
+                        <a:defRPr sz="1000"/>
+                      </a:pPr>
+                      <a:r>
+                        <a:t>춘절 명절 선물 세트용 B2B 캔 공급</a:t>
+                      </a:r>
+                    </a:p>
+                  </a:txBody>
+                  <a:tcPr/>
+                </a:tc>
+              </a:tr>
+              <a:tr h="473825">
+                <a:tc>
+                  <a:txBody>
+                    <a:bodyPr/>
+                    <a:lstStyle/>
+                    <a:p>
+                      <a:pPr>
+                        <a:defRPr sz="1000"/>
+                      </a:pPr>
+                      <a:r>
+                        <a:t>2위</a:t>
+                      </a:r>
+                    </a:p>
+                  </a:txBody>
+                  <a:tcPr/>
+                </a:tc>
+                <a:tc>
+                  <a:txBody>
+                    <a:bodyPr/>
+                    <a:lstStyle/>
+                    <a:p>
+                      <a:pPr>
+                        <a:defRPr sz="1000"/>
+                      </a:pPr>
+                      <a:r>
+                        <a:t>싱가포르 (Singapore)</a:t>
+                      </a:r>
+                    </a:p>
+                  </a:txBody>
+                  <a:tcPr/>
+                </a:tc>
+                <a:tc>
+                  <a:txBody>
+                    <a:bodyPr/>
+                    <a:lstStyle/>
+                    <a:p>
+                      <a:pPr>
+                        <a:defRPr sz="1000"/>
+                      </a:pPr>
+                      <a:r>
+                        <a:t>22.1%</a:t>
+                      </a:r>
+                    </a:p>
+                  </a:txBody>
+                  <a:tcPr/>
+                </a:tc>
+                <a:tc>
+                  <a:txBody>
+                    <a:bodyPr/>
+                    <a:lstStyle/>
+                    <a:p>
+                      <a:pPr>
+                        <a:defRPr sz="1000"/>
+                      </a:pPr>
+                      <a:r>
+                        <a:t>싱가포르 고급 선물 세트 유통 벤더</a:t>
+                      </a:r>
+                    </a:p>
+                  </a:txBody>
+                  <a:tcPr/>
+                </a:tc>
+                <a:tc>
+                  <a:txBody>
+                    <a:bodyPr/>
+                    <a:lstStyle/>
+                    <a:p>
+                      <a:pPr>
+                        <a:defRPr sz="1000"/>
+                      </a:pPr>
+                      <a:r>
+                        <a:t>명절/기념일 프리미엄 캔 공급</a:t>
+                      </a:r>
+                    </a:p>
+                  </a:txBody>
+                  <a:tcPr/>
+                </a:tc>
+              </a:tr>
+              <a:tr h="473825">
+                <a:tc>
+                  <a:txBody>
+                    <a:bodyPr/>
+                    <a:lstStyle/>
+                    <a:p>
+                      <a:pPr>
+                        <a:defRPr sz="1000"/>
+                      </a:pPr>
+                      <a:r>
+                        <a:t>3위</a:t>
+                      </a:r>
+                    </a:p>
+                  </a:txBody>
+                  <a:tcPr/>
+                </a:tc>
+                <a:tc>
+                  <a:txBody>
+                    <a:bodyPr/>
+                    <a:lstStyle/>
+                    <a:p>
+                      <a:pPr>
+                        <a:defRPr sz="1000"/>
+                      </a:pPr>
+                      <a:r>
+                        <a:t>미국 (USA)</a:t>
+                      </a:r>
+                    </a:p>
+                  </a:txBody>
+                  <a:tcPr/>
+                </a:tc>
+                <a:tc>
+                  <a:txBody>
+                    <a:bodyPr/>
+                    <a:lstStyle/>
+                    <a:p>
+                      <a:pPr>
+                        <a:defRPr sz="1000"/>
+                      </a:pPr>
+                      <a:r>
+                        <a:t>14.8%</a:t>
+                      </a:r>
+                    </a:p>
+                  </a:txBody>
+                  <a:tcPr/>
+                </a:tc>
+                <a:tc>
+                  <a:txBody>
+                    <a:bodyPr/>
+                    <a:lstStyle/>
+                    <a:p>
+                      <a:pPr>
+                        <a:defRPr sz="1000"/>
+                      </a:pPr>
+                      <a:r>
+                        <a:t>북미 아시안 식품 수입 벤더</a:t>
+                      </a:r>
+                    </a:p>
+                  </a:txBody>
+                  <a:tcPr/>
+                </a:tc>
+                <a:tc>
+                  <a:txBody>
+                    <a:bodyPr/>
+                    <a:lstStyle/>
+                    <a:p>
+                      <a:pPr>
+                        <a:defRPr sz="1000"/>
+                      </a:pPr>
+                      <a:r>
+                        <a:t>FDA LACF 승인 캔 통조림 유통</a:t>
+                      </a:r>
+                    </a:p>
+                  </a:txBody>
+                  <a:tcPr/>
+                </a:tc>
+              </a:tr>
+              <a:tr h="473825">
+                <a:tc>
+                  <a:txBody>
+                    <a:bodyPr/>
+                    <a:lstStyle/>
+                    <a:p>
+                      <a:pPr>
+                        <a:defRPr sz="1000"/>
+                      </a:pPr>
+                      <a:r>
+                        <a:t>4위</a:t>
+                      </a:r>
+                    </a:p>
+                  </a:txBody>
+                  <a:tcPr/>
+                </a:tc>
+                <a:tc>
+                  <a:txBody>
+                    <a:bodyPr/>
+                    <a:lstStyle/>
+                    <a:p>
+                      <a:pPr>
+                        <a:defRPr sz="1000"/>
+                      </a:pPr>
+                      <a:r>
+                        <a:t>대만 (Taiwan)</a:t>
+                      </a:r>
+                    </a:p>
+                  </a:txBody>
+                  <a:tcPr/>
+                </a:tc>
+                <a:tc>
+                  <a:txBody>
+                    <a:bodyPr/>
+                    <a:lstStyle/>
+                    <a:p>
+                      <a:pPr>
+                        <a:defRPr sz="1000"/>
+                      </a:pPr>
+                      <a:r>
+                        <a:t>4.2%</a:t>
+                      </a:r>
+                    </a:p>
+                  </a:txBody>
+                  <a:tcPr/>
+                </a:tc>
+                <a:tc>
+                  <a:txBody>
+                    <a:bodyPr/>
+                    <a:lstStyle/>
+                    <a:p>
+                      <a:pPr>
+                        <a:defRPr sz="1000"/>
+                      </a:pPr>
+                      <a:r>
+                        <a:t>명절 선물 세트 수입 유통사</a:t>
+                      </a:r>
+                    </a:p>
+                  </a:txBody>
+                  <a:tcPr/>
+                </a:tc>
+                <a:tc>
+                  <a:txBody>
+                    <a:bodyPr/>
+                    <a:lstStyle/>
+                    <a:p>
+                      <a:pPr>
+                        <a:defRPr sz="1000"/>
+                      </a:pPr>
+                      <a:r>
+                        <a:t>명절 고급 전복 캔 선물 세트 공급</a:t>
+                      </a:r>
+                    </a:p>
+                  </a:txBody>
+                  <a:tcPr/>
+                </a:tc>
+              </a:tr>
+              <a:tr h="473825">
+                <a:tc>
+                  <a:txBody>
+                    <a:bodyPr/>
+                    <a:lstStyle/>
+                    <a:p>
+                      <a:pPr>
+                        <a:defRPr sz="1000"/>
+                      </a:pPr>
+                      <a:r>
+                        <a:t>5위</a:t>
+                      </a:r>
+                    </a:p>
+                  </a:txBody>
+                  <a:tcPr/>
+                </a:tc>
+                <a:tc>
+                  <a:txBody>
+                    <a:bodyPr/>
+                    <a:lstStyle/>
+                    <a:p>
+                      <a:pPr>
+                        <a:defRPr sz="1000"/>
+                      </a:pPr>
+                      <a:r>
+                        <a:t>캐나다 (Canada)</a:t>
+                      </a:r>
+                    </a:p>
+                  </a:txBody>
+                  <a:tcPr/>
+                </a:tc>
+                <a:tc>
+                  <a:txBody>
+                    <a:bodyPr/>
+                    <a:lstStyle/>
+                    <a:p>
+                      <a:pPr>
+                        <a:defRPr sz="1000"/>
+                      </a:pPr>
+                      <a:r>
+                        <a:t>3.1%</a:t>
+                      </a:r>
+                    </a:p>
+                  </a:txBody>
+                  <a:tcPr/>
+                </a:tc>
+                <a:tc>
+                  <a:txBody>
+                    <a:bodyPr/>
+                    <a:lstStyle/>
+                    <a:p>
+                      <a:pPr>
+                        <a:defRPr sz="1000"/>
+                      </a:pPr>
+                      <a:r>
+                        <a:t>밴쿠버 아시안 마트 유통 벤더</a:t>
+                      </a:r>
+                    </a:p>
+                  </a:txBody>
+                  <a:tcPr/>
+                </a:tc>
+                <a:tc>
+                  <a:txBody>
+                    <a:bodyPr/>
+                    <a:lstStyle/>
+                    <a:p>
+                      <a:pPr>
+                        <a:defRPr sz="1000"/>
+                      </a:pPr>
+                      <a:r>
+                        <a:t>한인/중국인 마트 캔 전복 공급</a:t>
+                      </a:r>
+                    </a:p>
+                  </a:txBody>
+                  <a:tcPr/>
+                </a:tc>
+              </a:tr>
+              <a:tr h="473825">
+                <a:tc>
+                  <a:txBody>
+                    <a:bodyPr/>
+                    <a:lstStyle/>
+                    <a:p>
+                      <a:pPr>
+                        <a:defRPr sz="1000"/>
+                      </a:pPr>
+                      <a:r>
+                        <a:t>6위</a:t>
+                      </a:r>
+                    </a:p>
+                  </a:txBody>
+                  <a:tcPr/>
+                </a:tc>
+                <a:tc>
+                  <a:txBody>
+                    <a:bodyPr/>
+                    <a:lstStyle/>
+                    <a:p>
+                      <a:pPr>
+                        <a:defRPr sz="1000"/>
+                      </a:pPr>
+                      <a:r>
+                        <a:t>호주 (Australia)</a:t>
+                      </a:r>
+                    </a:p>
+                  </a:txBody>
+                  <a:tcPr/>
+                </a:tc>
+                <a:tc>
+                  <a:txBody>
+                    <a:bodyPr/>
+                    <a:lstStyle/>
+                    <a:p>
+                      <a:pPr>
+                        <a:defRPr sz="1000"/>
+                      </a:pPr>
+                      <a:r>
+                        <a:t>2.3%</a:t>
+                      </a:r>
+                    </a:p>
+                  </a:txBody>
+                  <a:tcPr/>
+                </a:tc>
+                <a:tc>
+                  <a:txBody>
+                    <a:bodyPr/>
+                    <a:lstStyle/>
+                    <a:p>
+                      <a:pPr>
+                        <a:defRPr sz="1000"/>
+                      </a:pPr>
+                      <a:r>
+                        <a:t>시드니/멜버른 아시안 식품 수입상</a:t>
+                      </a:r>
+                    </a:p>
+                  </a:txBody>
+                  <a:tcPr/>
+                </a:tc>
+                <a:tc>
+                  <a:txBody>
+                    <a:bodyPr/>
+                    <a:lstStyle/>
+                    <a:p>
+                      <a:pPr>
+                        <a:defRPr sz="1000"/>
+                      </a:pPr>
+                      <a:r>
+                        <a:t>선물용 캔 전복 유통</a:t>
+                      </a:r>
+                    </a:p>
+                  </a:txBody>
+                  <a:tcPr/>
+                </a:tc>
+              </a:tr>
+              <a:tr h="473825">
+                <a:tc>
+                  <a:txBody>
+                    <a:bodyPr/>
+                    <a:lstStyle/>
+                    <a:p>
+                      <a:pPr>
+                        <a:defRPr sz="1000"/>
+                      </a:pPr>
+                      <a:r>
+                        <a:t>7위</a:t>
+                      </a:r>
+                    </a:p>
+                  </a:txBody>
+                  <a:tcPr/>
+                </a:tc>
+                <a:tc>
+                  <a:txBody>
+                    <a:bodyPr/>
+                    <a:lstStyle/>
+                    <a:p>
+                      <a:pPr>
+                        <a:defRPr sz="1000"/>
+                      </a:pPr>
+                      <a:r>
+                        <a:t>일본 (Japan)</a:t>
+                      </a:r>
+                    </a:p>
+                  </a:txBody>
+                  <a:tcPr/>
+                </a:tc>
+                <a:tc>
+                  <a:txBody>
+                    <a:bodyPr/>
+                    <a:lstStyle/>
+                    <a:p>
+                      <a:pPr>
+                        <a:defRPr sz="1000"/>
+                      </a:pPr>
+                      <a:r>
+                        <a:t>1.8%</a:t>
+                      </a:r>
+                    </a:p>
+                  </a:txBody>
+                  <a:tcPr/>
+                </a:tc>
+                <a:tc>
+                  <a:txBody>
+                    <a:bodyPr/>
+                    <a:lstStyle/>
+                    <a:p>
+                      <a:pPr>
+                        <a:defRPr sz="1000"/>
+                      </a:pPr>
+                      <a:r>
+                        <a:t>고급 통조림 식자재 유통사</a:t>
+                      </a:r>
+                    </a:p>
+                  </a:txBody>
+                  <a:tcPr/>
+                </a:tc>
+                <a:tc>
+                  <a:txBody>
+                    <a:bodyPr/>
+                    <a:lstStyle/>
+                    <a:p>
+                      <a:pPr>
+                        <a:defRPr sz="1000"/>
+                      </a:pPr>
+                      <a:r>
+                        <a:t>료칸 및 기프트 숍 고급 캔 오퍼</a:t>
+                      </a:r>
+                    </a:p>
+                  </a:txBody>
+                  <a:tcPr/>
+                </a:tc>
+              </a:tr>
+              <a:tr h="473825">
+                <a:tc>
+                  <a:txBody>
+                    <a:bodyPr/>
+                    <a:lstStyle/>
+                    <a:p>
+                      <a:pPr>
+                        <a:defRPr sz="1000"/>
+                      </a:pPr>
+                      <a:r>
+                        <a:t>8위</a:t>
+                      </a:r>
+                    </a:p>
+                  </a:txBody>
+                  <a:tcPr/>
+                </a:tc>
+                <a:tc>
+                  <a:txBody>
+                    <a:bodyPr/>
+                    <a:lstStyle/>
+                    <a:p>
+                      <a:pPr>
+                        <a:defRPr sz="1000"/>
+                      </a:pPr>
+                      <a:r>
+                        <a:t>베트남 (Vietnam)</a:t>
+                      </a:r>
+                    </a:p>
+                  </a:txBody>
+                  <a:tcPr/>
+                </a:tc>
+                <a:tc>
+                  <a:txBody>
+                    <a:bodyPr/>
+                    <a:lstStyle/>
+                    <a:p>
+                      <a:pPr>
+                        <a:defRPr sz="1000"/>
+                      </a:pPr>
+                      <a:r>
+                        <a:t>1.2%</a:t>
+                      </a:r>
+                    </a:p>
+                  </a:txBody>
+                  <a:tcPr/>
+                </a:tc>
+                <a:tc>
+                  <a:txBody>
+                    <a:bodyPr/>
+                    <a:lstStyle/>
+                    <a:p>
+                      <a:pPr>
+                        <a:defRPr sz="1000"/>
+                      </a:pPr>
+                      <a:r>
+                        <a:t>고급 선물 세트 수입상</a:t>
+                      </a:r>
+                    </a:p>
+                  </a:txBody>
+                  <a:tcPr/>
+                </a:tc>
+                <a:tc>
+                  <a:txBody>
+                    <a:bodyPr/>
+                    <a:lstStyle/>
+                    <a:p>
+                      <a:pPr>
+                        <a:defRPr sz="1000"/>
+                      </a:pPr>
+                      <a:r>
+                        <a:t>호치민/하노이 명절 선물용 캔 공급</a:t>
+                      </a:r>
+                    </a:p>
+                  </a:txBody>
+                  <a:tcPr/>
+                </a:tc>
+              </a:tr>
+              <a:tr h="473825">
+                <a:tc>
+                  <a:txBody>
+                    <a:bodyPr/>
+                    <a:lstStyle/>
+                    <a:p>
+                      <a:pPr>
+                        <a:defRPr sz="1000"/>
+                      </a:pPr>
+                      <a:r>
+                        <a:t>9위</a:t>
+                      </a:r>
+                    </a:p>
+                  </a:txBody>
+                  <a:tcPr/>
+                </a:tc>
+                <a:tc>
+                  <a:txBody>
+                    <a:bodyPr/>
+                    <a:lstStyle/>
+                    <a:p>
+                      <a:pPr>
+                        <a:defRPr sz="1000"/>
+                      </a:pPr>
+                      <a:r>
+                        <a:t>태국 (Thailand)</a:t>
+                      </a:r>
+                    </a:p>
+                  </a:txBody>
+                  <a:tcPr/>
+                </a:tc>
+                <a:tc>
+                  <a:txBody>
+                    <a:bodyPr/>
+                    <a:lstStyle/>
+                    <a:p>
+                      <a:pPr>
+                        <a:defRPr sz="1000"/>
+                      </a:pPr>
+                      <a:r>
+                        <a:t>1.1%</a:t>
+                      </a:r>
+                    </a:p>
+                  </a:txBody>
+                  <a:tcPr/>
+                </a:tc>
+                <a:tc>
+                  <a:txBody>
+                    <a:bodyPr/>
+                    <a:lstStyle/>
+                    <a:p>
+                      <a:pPr>
+                        <a:defRPr sz="1000"/>
+                      </a:pPr>
+                      <a:r>
+                        <a:t>방콕 아시안 식품 수입 벤더</a:t>
+                      </a:r>
+                    </a:p>
+                  </a:txBody>
+                  <a:tcPr/>
+                </a:tc>
+                <a:tc>
+                  <a:txBody>
+                    <a:bodyPr/>
+                    <a:lstStyle/>
+                    <a:p>
+                      <a:pPr>
+                        <a:defRPr sz="1000"/>
+                      </a:pPr>
+                      <a:r>
+                        <a:t>고급 아시안 마트 캔 유통</a:t>
+                      </a:r>
+                    </a:p>
+                  </a:txBody>
+                  <a:tcPr/>
+                </a:tc>
+              </a:tr>
+              <a:tr h="473830">
+                <a:tc>
+                  <a:txBody>
+                    <a:bodyPr/>
+                    <a:lstStyle/>
+                    <a:p>
+                      <a:pPr>
+                        <a:defRPr sz="1000"/>
+                      </a:pPr>
+                      <a:r>
+                        <a:t>10위</a:t>
+                      </a:r>
+                    </a:p>
+                  </a:txBody>
+                  <a:tcPr/>
+                </a:tc>
+                <a:tc>
+                  <a:txBody>
+                    <a:bodyPr/>
+                    <a:lstStyle/>
+                    <a:p>
+                      <a:pPr>
+                        <a:defRPr sz="1000"/>
+                      </a:pPr>
+                      <a:r>
+                        <a:t>영국 (United Kingdom)</a:t>
+                      </a:r>
+                    </a:p>
+                  </a:txBody>
+                  <a:tcPr/>
+                </a:tc>
+                <a:tc>
+                  <a:txBody>
+                    <a:bodyPr/>
+                    <a:lstStyle/>
+                    <a:p>
+                      <a:pPr>
+                        <a:defRPr sz="1000"/>
+                      </a:pPr>
+                      <a:r>
+                        <a:t>0.9%</a:t>
+                      </a:r>
+                    </a:p>
+                  </a:txBody>
+                  <a:tcPr/>
+                </a:tc>
+                <a:tc>
+                  <a:txBody>
+                    <a:bodyPr/>
+                    <a:lstStyle/>
+                    <a:p>
+                      <a:pPr>
+                        <a:defRPr sz="1000"/>
+                      </a:pPr>
+                      <a:r>
+                        <a:t>런던 프리미엄 기프트 숍 벤더</a:t>
+                      </a:r>
+                    </a:p>
+                  </a:txBody>
+                  <a:tcPr/>
+                </a:tc>
+                <a:tc>
+                  <a:txBody>
+                    <a:bodyPr/>
+                    <a:lstStyle/>
+                    <a:p>
+                      <a:pPr>
+                        <a:defRPr sz="1000"/>
+                      </a:pPr>
+                      <a:r>
+                        <a:t>런던 아시안 명절 기프트 공급</a:t>
+                      </a:r>
+                    </a:p>
+                  </a:txBody>
+                  <a:tcPr/>
+                </a:tc>
+              </a:tr>
+            </a:tbl>
+          </a:graphicData>
+        </a:graphic>
+      </p:graphicFrame>
+    </p:spTree>
+  </p:cSld>
+  <p:clrMapOvr>
+    <a:masterClrMapping/>
+  </p:clrMapOvr>
+</p:sld>
+</file>
+
 <file path=ppt/slides/slide6.xml><?xml version="1.0" encoding="utf-8"?>
 <p:sld xmlns:a="http://schemas.openxmlformats.org/drawingml/2006/main" xmlns:p="http://schemas.openxmlformats.org/presentationml/2006/main" xmlns:r="http://schemas.openxmlformats.org/officeDocument/2006/relationships">
   <p:cSld>
@@ -5030,14 +7682,14 @@
               </a:defRPr>
             </a:pPr>
             <a:r>
-              <a:t>📊 4. 전복 평균 단가 ($/kg) 분포</a:t>
+              <a:t>📊 1. 연도별 무역액 추이</a:t>
             </a:r>
           </a:p>
         </p:txBody>
       </p:sp>
       <p:pic>
         <p:nvPicPr>
-          <p:cNvPr id="3" name="Picture 2" descr="04_unit_price_distribution.png"/>
+          <p:cNvPr id="3" name="Picture 2" descr="01_annual_trade_trend.png"/>
           <p:cNvPicPr>
             <a:picLocks noChangeAspect="1"/>
           </p:cNvPicPr>
@@ -5107,14 +7759,14 @@
               </a:defRPr>
             </a:pPr>
             <a:r>
-              <a:t>📊 5. 월별 거래 계절성 지수</a:t>
+              <a:t>📊 2. TOP 10 주요 수출국 무역액</a:t>
             </a:r>
           </a:p>
         </p:txBody>
       </p:sp>
       <p:pic>
         <p:nvPicPr>
-          <p:cNvPr id="3" name="Picture 2" descr="05_monthly_seasonality.png"/>
+          <p:cNvPr id="3" name="Picture 2" descr="02_top_exporter_ranking.png"/>
           <p:cNvPicPr>
             <a:picLocks noChangeAspect="1"/>
           </p:cNvPicPr>
@@ -5184,14 +7836,14 @@
               </a:defRPr>
             </a:pPr>
             <a:r>
-              <a:t>📊 6. HS Code별 거래액 점유율</a:t>
+              <a:t>📊 3. TOP 10 주요 수입국 무역액</a:t>
             </a:r>
           </a:p>
         </p:txBody>
       </p:sp>
       <p:pic>
         <p:nvPicPr>
-          <p:cNvPr id="3" name="Picture 2" descr="06_hs_code_share.png"/>
+          <p:cNvPr id="3" name="Picture 2" descr="03_top_importer_ranking.png"/>
           <p:cNvPicPr>
             <a:picLocks noChangeAspect="1"/>
           </p:cNvPicPr>
@@ -5206,7 +7858,7 @@
         <p:spPr>
           <a:xfrm>
             <a:off x="1371600" y="1280160"/>
-            <a:ext cx="9448495" cy="9448495"/>
+            <a:ext cx="9448495" cy="4724248"/>
           </a:xfrm>
           <a:prstGeom prst="rect">
             <a:avLst/>
@@ -5261,14 +7913,14 @@
               </a:defRPr>
             </a:pPr>
             <a:r>
-              <a:t>📊 7. 물량 vs 단가 상관관계 산점도</a:t>
+              <a:t>📊 4. 전복 평균 단가 ($/kg) 분포</a:t>
             </a:r>
           </a:p>
         </p:txBody>
       </p:sp>
       <p:pic>
         <p:nvPicPr>
-          <p:cNvPr id="3" name="Picture 2" descr="07_price_vs_weight_scatter.png"/>
+          <p:cNvPr id="3" name="Picture 2" descr="04_unit_price_distribution.png"/>
           <p:cNvPicPr>
             <a:picLocks noChangeAspect="1"/>
           </p:cNvPicPr>
